--- a/weekly-ppt/ecoco_週報_第29週_0713-0719.pptx
+++ b/weekly-ppt/ecoco_週報_第29週_0713-0719.pptx
@@ -4,14 +4,14 @@
   <p:sldMasterIdLst>
     <p:sldMasterId id="2147483648" r:id="rId1"/>
   </p:sldMasterIdLst>
+  <p:notesMasterIdLst>
+    <p:notesMasterId r:id="rId4"/>
+  </p:notesMasterIdLst>
   <p:sldIdLst>
     <p:sldId id="256" r:id="rId2"/>
     <p:sldId id="257" r:id="rId3"/>
   </p:sldIdLst>
-  <p:notesMasterIdLst>
-    <p:notesMasterId r:id="rId4"/>
-  </p:notesMasterIdLst>
-  <p:sldSz cx="9144000" cy="5143500"/>
+  <p:sldSz cx="9144000" cy="5143500" type="screen16x9"/>
   <p:notesSz cx="5143500" cy="9144000"/>
   <p:defaultTextStyle>
     <a:lvl1pPr marL="0" algn="l" defTabSz="914400" rtl="0" eaLnBrk="1" latinLnBrk="0" hangingPunct="1">
@@ -105,13 +105,20 @@
       </a:defRPr>
     </a:lvl9pPr>
   </p:defaultTextStyle>
+  <p:extLst>
+    <p:ext uri="{EFAFB233-063F-42B5-8137-9DF3F51BA10A}">
+      <p15:sldGuideLst xmlns:p15="http://schemas.microsoft.com/office/powerpoint/2012/main"/>
+    </p:ext>
+  </p:extLst>
 </p:presentation>
 </file>
 
 <file path=ppt/charts/chart1.xml><?xml version="1.0" encoding="utf-8"?>
-<c:chartSpace xmlns:c="http://schemas.openxmlformats.org/drawingml/2006/chart" xmlns:a="http://schemas.openxmlformats.org/drawingml/2006/main" xmlns:r="http://schemas.openxmlformats.org/officeDocument/2006/relationships">
+<c:chartSpace xmlns:c="http://schemas.openxmlformats.org/drawingml/2006/chart" xmlns:a="http://schemas.openxmlformats.org/drawingml/2006/main" xmlns:r="http://schemas.openxmlformats.org/officeDocument/2006/relationships" xmlns:c16r2="http://schemas.microsoft.com/office/drawing/2015/06/chart">
   <c:date1904 val="0"/>
+  <c:lang val="zh-TW"/>
   <c:roundedCorners val="1"/>
+  <c:style val="2"/>
   <c:chart>
     <c:autoTitleDeleted val="1"/>
     <c:plotArea>
@@ -143,13 +150,7 @@
               <a:prstDash val="solid"/>
               <a:round/>
             </a:ln>
-            <a:effectLst>
-              <a:noneShdw sx="100000" sy="100000" kx="0" ky="0" algn="bl" blurRad="38100" rotWithShape="1" dist="23000" dir="5400000">
-                <a:srgbClr val="000000">
-                  <a:alpha val="35000"/>
-                </a:srgbClr>
-              </a:noneShdw>
-            </a:effectLst>
+            <a:effectLst/>
           </c:spPr>
           <c:dPt>
             <c:idx val="0"/>
@@ -158,14 +159,13 @@
               <a:solidFill>
                 <a:srgbClr val="060E9F"/>
               </a:solidFill>
-              <a:effectLst>
-                <a:noneShdw sx="100000" sy="100000" kx="0" ky="0" algn="bl" blurRad="38100" rotWithShape="1" dist="23000" dir="5400000">
-                  <a:srgbClr val="000000">
-                    <a:alpha val="35000"/>
-                  </a:srgbClr>
-                </a:noneShdw>
-              </a:effectLst>
+              <a:effectLst/>
             </c:spPr>
+            <c:extLst>
+              <c:ext xmlns:c16="http://schemas.microsoft.com/office/drawing/2014/chart" uri="{C3380CC4-5D6E-409C-BE32-E72D297353CC}">
+                <c16:uniqueId val="{00000001-B0D9-47FD-8825-3F1BD5064E3C}"/>
+              </c:ext>
+            </c:extLst>
           </c:dPt>
           <c:dPt>
             <c:idx val="1"/>
@@ -174,14 +174,13 @@
               <a:solidFill>
                 <a:srgbClr val="FF5000"/>
               </a:solidFill>
-              <a:effectLst>
-                <a:noneShdw sx="100000" sy="100000" kx="0" ky="0" algn="bl" blurRad="38100" rotWithShape="1" dist="23000" dir="5400000">
-                  <a:srgbClr val="000000">
-                    <a:alpha val="35000"/>
-                  </a:srgbClr>
-                </a:noneShdw>
-              </a:effectLst>
+              <a:effectLst/>
             </c:spPr>
+            <c:extLst>
+              <c:ext xmlns:c16="http://schemas.microsoft.com/office/drawing/2014/chart" uri="{C3380CC4-5D6E-409C-BE32-E72D297353CC}">
+                <c16:uniqueId val="{00000003-B0D9-47FD-8825-3F1BD5064E3C}"/>
+              </c:ext>
+            </c:extLst>
           </c:dPt>
           <c:dPt>
             <c:idx val="2"/>
@@ -190,14 +189,13 @@
               <a:solidFill>
                 <a:srgbClr val="0076A9"/>
               </a:solidFill>
-              <a:effectLst>
-                <a:noneShdw sx="100000" sy="100000" kx="0" ky="0" algn="bl" blurRad="38100" rotWithShape="1" dist="23000" dir="5400000">
-                  <a:srgbClr val="000000">
-                    <a:alpha val="35000"/>
-                  </a:srgbClr>
-                </a:noneShdw>
-              </a:effectLst>
+              <a:effectLst/>
             </c:spPr>
+            <c:extLst>
+              <c:ext xmlns:c16="http://schemas.microsoft.com/office/drawing/2014/chart" uri="{C3380CC4-5D6E-409C-BE32-E72D297353CC}">
+                <c16:uniqueId val="{00000005-B0D9-47FD-8825-3F1BD5064E3C}"/>
+              </c:ext>
+            </c:extLst>
           </c:dPt>
           <c:dPt>
             <c:idx val="3"/>
@@ -206,14 +204,13 @@
               <a:solidFill>
                 <a:srgbClr val="FFCE00"/>
               </a:solidFill>
-              <a:effectLst>
-                <a:noneShdw sx="100000" sy="100000" kx="0" ky="0" algn="bl" blurRad="38100" rotWithShape="1" dist="23000" dir="5400000">
-                  <a:srgbClr val="000000">
-                    <a:alpha val="35000"/>
-                  </a:srgbClr>
-                </a:noneShdw>
-              </a:effectLst>
+              <a:effectLst/>
             </c:spPr>
+            <c:extLst>
+              <c:ext xmlns:c16="http://schemas.microsoft.com/office/drawing/2014/chart" uri="{C3380CC4-5D6E-409C-BE32-E72D297353CC}">
+                <c16:uniqueId val="{00000007-B0D9-47FD-8825-3F1BD5064E3C}"/>
+              </c:ext>
+            </c:extLst>
           </c:dPt>
           <c:dPt>
             <c:idx val="4"/>
@@ -222,14 +219,13 @@
               <a:solidFill>
                 <a:srgbClr val="8EB8C9"/>
               </a:solidFill>
-              <a:effectLst>
-                <a:noneShdw sx="100000" sy="100000" kx="0" ky="0" algn="bl" blurRad="38100" rotWithShape="1" dist="23000" dir="5400000">
-                  <a:srgbClr val="000000">
-                    <a:alpha val="35000"/>
-                  </a:srgbClr>
-                </a:noneShdw>
-              </a:effectLst>
+              <a:effectLst/>
             </c:spPr>
+            <c:extLst>
+              <c:ext xmlns:c16="http://schemas.microsoft.com/office/drawing/2014/chart" uri="{C3380CC4-5D6E-409C-BE32-E72D297353CC}">
+                <c16:uniqueId val="{00000009-B0D9-47FD-8825-3F1BD5064E3C}"/>
+              </c:ext>
+            </c:extLst>
           </c:dPt>
           <c:dPt>
             <c:idx val="5"/>
@@ -238,14 +234,13 @@
               <a:solidFill>
                 <a:srgbClr val="FAE0B8"/>
               </a:solidFill>
-              <a:effectLst>
-                <a:noneShdw sx="100000" sy="100000" kx="0" ky="0" algn="bl" blurRad="38100" rotWithShape="1" dist="23000" dir="5400000">
-                  <a:srgbClr val="000000">
-                    <a:alpha val="35000"/>
-                  </a:srgbClr>
-                </a:noneShdw>
-              </a:effectLst>
+              <a:effectLst/>
             </c:spPr>
+            <c:extLst>
+              <c:ext xmlns:c16="http://schemas.microsoft.com/office/drawing/2014/chart" uri="{C3380CC4-5D6E-409C-BE32-E72D297353CC}">
+                <c16:uniqueId val="{0000000B-B0D9-47FD-8825-3F1BD5064E3C}"/>
+              </c:ext>
+            </c:extLst>
           </c:dPt>
           <c:dLbls>
             <c:dLbl>
@@ -264,6 +259,7 @@
                       <a:latin typeface="Arial"/>
                     </a:defRPr>
                   </a:pPr>
+                  <a:endParaRPr lang="zh-TW"/>
                 </a:p>
               </c:txPr>
               <c:showLegendKey val="0"/>
@@ -272,6 +268,12 @@
               <c:showSerName val="0"/>
               <c:showPercent val="1"/>
               <c:showBubbleSize val="0"/>
+              <c:extLst>
+                <c:ext xmlns:c15="http://schemas.microsoft.com/office/drawing/2012/chart" uri="{CE6537A1-D6FC-4f65-9D91-7224C49458BB}"/>
+                <c:ext xmlns:c16="http://schemas.microsoft.com/office/drawing/2014/chart" uri="{C3380CC4-5D6E-409C-BE32-E72D297353CC}">
+                  <c16:uniqueId val="{00000001-B0D9-47FD-8825-3F1BD5064E3C}"/>
+                </c:ext>
+              </c:extLst>
             </c:dLbl>
             <c:dLbl>
               <c:idx val="1"/>
@@ -289,6 +291,7 @@
                       <a:latin typeface="Arial"/>
                     </a:defRPr>
                   </a:pPr>
+                  <a:endParaRPr lang="zh-TW"/>
                 </a:p>
               </c:txPr>
               <c:showLegendKey val="0"/>
@@ -297,6 +300,12 @@
               <c:showSerName val="0"/>
               <c:showPercent val="1"/>
               <c:showBubbleSize val="0"/>
+              <c:extLst>
+                <c:ext xmlns:c15="http://schemas.microsoft.com/office/drawing/2012/chart" uri="{CE6537A1-D6FC-4f65-9D91-7224C49458BB}"/>
+                <c:ext xmlns:c16="http://schemas.microsoft.com/office/drawing/2014/chart" uri="{C3380CC4-5D6E-409C-BE32-E72D297353CC}">
+                  <c16:uniqueId val="{00000003-B0D9-47FD-8825-3F1BD5064E3C}"/>
+                </c:ext>
+              </c:extLst>
             </c:dLbl>
             <c:dLbl>
               <c:idx val="2"/>
@@ -314,6 +323,7 @@
                       <a:latin typeface="Arial"/>
                     </a:defRPr>
                   </a:pPr>
+                  <a:endParaRPr lang="zh-TW"/>
                 </a:p>
               </c:txPr>
               <c:showLegendKey val="0"/>
@@ -322,6 +332,12 @@
               <c:showSerName val="0"/>
               <c:showPercent val="1"/>
               <c:showBubbleSize val="0"/>
+              <c:extLst>
+                <c:ext xmlns:c15="http://schemas.microsoft.com/office/drawing/2012/chart" uri="{CE6537A1-D6FC-4f65-9D91-7224C49458BB}"/>
+                <c:ext xmlns:c16="http://schemas.microsoft.com/office/drawing/2014/chart" uri="{C3380CC4-5D6E-409C-BE32-E72D297353CC}">
+                  <c16:uniqueId val="{00000005-B0D9-47FD-8825-3F1BD5064E3C}"/>
+                </c:ext>
+              </c:extLst>
             </c:dLbl>
             <c:dLbl>
               <c:idx val="3"/>
@@ -339,6 +355,7 @@
                       <a:latin typeface="Arial"/>
                     </a:defRPr>
                   </a:pPr>
+                  <a:endParaRPr lang="zh-TW"/>
                 </a:p>
               </c:txPr>
               <c:showLegendKey val="0"/>
@@ -347,6 +364,12 @@
               <c:showSerName val="0"/>
               <c:showPercent val="1"/>
               <c:showBubbleSize val="0"/>
+              <c:extLst>
+                <c:ext xmlns:c15="http://schemas.microsoft.com/office/drawing/2012/chart" uri="{CE6537A1-D6FC-4f65-9D91-7224C49458BB}"/>
+                <c:ext xmlns:c16="http://schemas.microsoft.com/office/drawing/2014/chart" uri="{C3380CC4-5D6E-409C-BE32-E72D297353CC}">
+                  <c16:uniqueId val="{00000007-B0D9-47FD-8825-3F1BD5064E3C}"/>
+                </c:ext>
+              </c:extLst>
             </c:dLbl>
             <c:dLbl>
               <c:idx val="4"/>
@@ -364,6 +387,7 @@
                       <a:latin typeface="Arial"/>
                     </a:defRPr>
                   </a:pPr>
+                  <a:endParaRPr lang="zh-TW"/>
                 </a:p>
               </c:txPr>
               <c:showLegendKey val="0"/>
@@ -372,6 +396,12 @@
               <c:showSerName val="0"/>
               <c:showPercent val="1"/>
               <c:showBubbleSize val="0"/>
+              <c:extLst>
+                <c:ext xmlns:c15="http://schemas.microsoft.com/office/drawing/2012/chart" uri="{CE6537A1-D6FC-4f65-9D91-7224C49458BB}"/>
+                <c:ext xmlns:c16="http://schemas.microsoft.com/office/drawing/2014/chart" uri="{C3380CC4-5D6E-409C-BE32-E72D297353CC}">
+                  <c16:uniqueId val="{00000009-B0D9-47FD-8825-3F1BD5064E3C}"/>
+                </c:ext>
+              </c:extLst>
             </c:dLbl>
             <c:dLbl>
               <c:idx val="5"/>
@@ -389,6 +419,7 @@
                       <a:latin typeface="Arial"/>
                     </a:defRPr>
                   </a:pPr>
+                  <a:endParaRPr lang="zh-TW"/>
                 </a:p>
               </c:txPr>
               <c:showLegendKey val="0"/>
@@ -397,8 +428,21 @@
               <c:showSerName val="0"/>
               <c:showPercent val="1"/>
               <c:showBubbleSize val="0"/>
+              <c:extLst>
+                <c:ext xmlns:c15="http://schemas.microsoft.com/office/drawing/2012/chart" uri="{CE6537A1-D6FC-4f65-9D91-7224C49458BB}"/>
+                <c:ext xmlns:c16="http://schemas.microsoft.com/office/drawing/2014/chart" uri="{C3380CC4-5D6E-409C-BE32-E72D297353CC}">
+                  <c16:uniqueId val="{0000000B-B0D9-47FD-8825-3F1BD5064E3C}"/>
+                </c:ext>
+              </c:extLst>
             </c:dLbl>
             <c:numFmt formatCode="0%" sourceLinked="0"/>
+            <c:spPr>
+              <a:noFill/>
+              <a:ln>
+                <a:noFill/>
+              </a:ln>
+              <a:effectLst/>
+            </c:spPr>
             <c:txPr>
               <a:bodyPr/>
               <a:lstStyle/>
@@ -411,6 +455,7 @@
                     <a:latin typeface="Arial"/>
                   </a:defRPr>
                 </a:pPr>
+                <a:endParaRPr lang="zh-TW"/>
               </a:p>
             </c:txPr>
             <c:dLblPos val="ctr"/>
@@ -421,6 +466,9 @@
             <c:showPercent val="1"/>
             <c:showBubbleSize val="0"/>
             <c:showLeaderLines val="0"/>
+            <c:extLst>
+              <c:ext xmlns:c15="http://schemas.microsoft.com/office/drawing/2012/chart" uri="{CE6537A1-D6FC-4f65-9D91-7224C49458BB}"/>
+            </c:extLst>
           </c:dLbls>
           <c:cat>
             <c:strRef>
@@ -452,6 +500,7 @@
             <c:numRef>
               <c:f>Sheet1!$B$2:$B$7</c:f>
               <c:numCache>
+                <c:formatCode>General</c:formatCode>
                 <c:ptCount val="6"/>
                 <c:pt idx="0">
                   <c:v>7</c:v>
@@ -474,7 +523,21 @@
               </c:numCache>
             </c:numRef>
           </c:val>
+          <c:extLst>
+            <c:ext xmlns:c16="http://schemas.microsoft.com/office/drawing/2014/chart" uri="{C3380CC4-5D6E-409C-BE32-E72D297353CC}">
+              <c16:uniqueId val="{0000000C-B0D9-47FD-8825-3F1BD5064E3C}"/>
+            </c:ext>
+          </c:extLst>
         </c:ser>
+        <c:dLbls>
+          <c:showLegendKey val="0"/>
+          <c:showVal val="0"/>
+          <c:showCatName val="0"/>
+          <c:showSerName val="0"/>
+          <c:showPercent val="0"/>
+          <c:showBubbleSize val="0"/>
+          <c:showLeaderLines val="0"/>
+        </c:dLbls>
         <c:firstSliceAng val="0"/>
       </c:pieChart>
       <c:spPr>
@@ -487,6 +550,7 @@
     </c:plotArea>
     <c:plotVisOnly val="1"/>
     <c:dispBlanksAs val="span"/>
+    <c:showDLblsOverMax val="1"/>
   </c:chart>
   <c:spPr>
     <a:noFill/>
@@ -502,9 +566,11 @@
 </file>
 
 <file path=ppt/charts/chart2.xml><?xml version="1.0" encoding="utf-8"?>
-<c:chartSpace xmlns:c="http://schemas.openxmlformats.org/drawingml/2006/chart" xmlns:a="http://schemas.openxmlformats.org/drawingml/2006/main" xmlns:r="http://schemas.openxmlformats.org/officeDocument/2006/relationships">
+<c:chartSpace xmlns:c="http://schemas.openxmlformats.org/drawingml/2006/chart" xmlns:a="http://schemas.openxmlformats.org/drawingml/2006/main" xmlns:r="http://schemas.openxmlformats.org/officeDocument/2006/relationships" xmlns:c16r2="http://schemas.microsoft.com/office/drawing/2015/06/chart">
   <c:date1904 val="0"/>
+  <c:lang val="zh-TW"/>
   <c:roundedCorners val="1"/>
+  <c:style val="2"/>
   <c:chart>
     <c:autoTitleDeleted val="1"/>
     <c:plotArea>
@@ -536,13 +602,7 @@
               <a:prstDash val="solid"/>
               <a:round/>
             </a:ln>
-            <a:effectLst>
-              <a:noneShdw sx="100000" sy="100000" kx="0" ky="0" algn="bl" blurRad="38100" rotWithShape="1" dist="23000" dir="5400000">
-                <a:srgbClr val="000000">
-                  <a:alpha val="35000"/>
-                </a:srgbClr>
-              </a:noneShdw>
-            </a:effectLst>
+            <a:effectLst/>
           </c:spPr>
           <c:dPt>
             <c:idx val="0"/>
@@ -551,14 +611,13 @@
               <a:solidFill>
                 <a:srgbClr val="FF5000"/>
               </a:solidFill>
-              <a:effectLst>
-                <a:noneShdw sx="100000" sy="100000" kx="0" ky="0" algn="bl" blurRad="38100" rotWithShape="1" dist="23000" dir="5400000">
-                  <a:srgbClr val="000000">
-                    <a:alpha val="35000"/>
-                  </a:srgbClr>
-                </a:noneShdw>
-              </a:effectLst>
+              <a:effectLst/>
             </c:spPr>
+            <c:extLst>
+              <c:ext xmlns:c16="http://schemas.microsoft.com/office/drawing/2014/chart" uri="{C3380CC4-5D6E-409C-BE32-E72D297353CC}">
+                <c16:uniqueId val="{00000001-3285-4A1D-ABB2-A664A7BFE3D4}"/>
+              </c:ext>
+            </c:extLst>
           </c:dPt>
           <c:dPt>
             <c:idx val="1"/>
@@ -567,14 +626,13 @@
               <a:solidFill>
                 <a:srgbClr val="060E9F"/>
               </a:solidFill>
-              <a:effectLst>
-                <a:noneShdw sx="100000" sy="100000" kx="0" ky="0" algn="bl" blurRad="38100" rotWithShape="1" dist="23000" dir="5400000">
-                  <a:srgbClr val="000000">
-                    <a:alpha val="35000"/>
-                  </a:srgbClr>
-                </a:noneShdw>
-              </a:effectLst>
+              <a:effectLst/>
             </c:spPr>
+            <c:extLst>
+              <c:ext xmlns:c16="http://schemas.microsoft.com/office/drawing/2014/chart" uri="{C3380CC4-5D6E-409C-BE32-E72D297353CC}">
+                <c16:uniqueId val="{00000003-3285-4A1D-ABB2-A664A7BFE3D4}"/>
+              </c:ext>
+            </c:extLst>
           </c:dPt>
           <c:dPt>
             <c:idx val="2"/>
@@ -583,14 +641,13 @@
               <a:solidFill>
                 <a:srgbClr val="0076A9"/>
               </a:solidFill>
-              <a:effectLst>
-                <a:noneShdw sx="100000" sy="100000" kx="0" ky="0" algn="bl" blurRad="38100" rotWithShape="1" dist="23000" dir="5400000">
-                  <a:srgbClr val="000000">
-                    <a:alpha val="35000"/>
-                  </a:srgbClr>
-                </a:noneShdw>
-              </a:effectLst>
+              <a:effectLst/>
             </c:spPr>
+            <c:extLst>
+              <c:ext xmlns:c16="http://schemas.microsoft.com/office/drawing/2014/chart" uri="{C3380CC4-5D6E-409C-BE32-E72D297353CC}">
+                <c16:uniqueId val="{00000005-3285-4A1D-ABB2-A664A7BFE3D4}"/>
+              </c:ext>
+            </c:extLst>
           </c:dPt>
           <c:dPt>
             <c:idx val="3"/>
@@ -599,14 +656,13 @@
               <a:solidFill>
                 <a:srgbClr val="FFCE00"/>
               </a:solidFill>
-              <a:effectLst>
-                <a:noneShdw sx="100000" sy="100000" kx="0" ky="0" algn="bl" blurRad="38100" rotWithShape="1" dist="23000" dir="5400000">
-                  <a:srgbClr val="000000">
-                    <a:alpha val="35000"/>
-                  </a:srgbClr>
-                </a:noneShdw>
-              </a:effectLst>
+              <a:effectLst/>
             </c:spPr>
+            <c:extLst>
+              <c:ext xmlns:c16="http://schemas.microsoft.com/office/drawing/2014/chart" uri="{C3380CC4-5D6E-409C-BE32-E72D297353CC}">
+                <c16:uniqueId val="{00000007-3285-4A1D-ABB2-A664A7BFE3D4}"/>
+              </c:ext>
+            </c:extLst>
           </c:dPt>
           <c:dPt>
             <c:idx val="4"/>
@@ -615,14 +671,13 @@
               <a:solidFill>
                 <a:srgbClr val="8EB8C9"/>
               </a:solidFill>
-              <a:effectLst>
-                <a:noneShdw sx="100000" sy="100000" kx="0" ky="0" algn="bl" blurRad="38100" rotWithShape="1" dist="23000" dir="5400000">
-                  <a:srgbClr val="000000">
-                    <a:alpha val="35000"/>
-                  </a:srgbClr>
-                </a:noneShdw>
-              </a:effectLst>
+              <a:effectLst/>
             </c:spPr>
+            <c:extLst>
+              <c:ext xmlns:c16="http://schemas.microsoft.com/office/drawing/2014/chart" uri="{C3380CC4-5D6E-409C-BE32-E72D297353CC}">
+                <c16:uniqueId val="{00000009-3285-4A1D-ABB2-A664A7BFE3D4}"/>
+              </c:ext>
+            </c:extLst>
           </c:dPt>
           <c:dPt>
             <c:idx val="5"/>
@@ -631,14 +686,13 @@
               <a:solidFill>
                 <a:srgbClr val="B8BEC8"/>
               </a:solidFill>
-              <a:effectLst>
-                <a:noneShdw sx="100000" sy="100000" kx="0" ky="0" algn="bl" blurRad="38100" rotWithShape="1" dist="23000" dir="5400000">
-                  <a:srgbClr val="000000">
-                    <a:alpha val="35000"/>
-                  </a:srgbClr>
-                </a:noneShdw>
-              </a:effectLst>
+              <a:effectLst/>
             </c:spPr>
+            <c:extLst>
+              <c:ext xmlns:c16="http://schemas.microsoft.com/office/drawing/2014/chart" uri="{C3380CC4-5D6E-409C-BE32-E72D297353CC}">
+                <c16:uniqueId val="{0000000B-3285-4A1D-ABB2-A664A7BFE3D4}"/>
+              </c:ext>
+            </c:extLst>
           </c:dPt>
           <c:dLbls>
             <c:dLbl>
@@ -657,6 +711,7 @@
                       <a:latin typeface="Arial"/>
                     </a:defRPr>
                   </a:pPr>
+                  <a:endParaRPr lang="zh-TW"/>
                 </a:p>
               </c:txPr>
               <c:showLegendKey val="0"/>
@@ -665,6 +720,12 @@
               <c:showSerName val="0"/>
               <c:showPercent val="1"/>
               <c:showBubbleSize val="0"/>
+              <c:extLst>
+                <c:ext xmlns:c15="http://schemas.microsoft.com/office/drawing/2012/chart" uri="{CE6537A1-D6FC-4f65-9D91-7224C49458BB}"/>
+                <c:ext xmlns:c16="http://schemas.microsoft.com/office/drawing/2014/chart" uri="{C3380CC4-5D6E-409C-BE32-E72D297353CC}">
+                  <c16:uniqueId val="{00000001-3285-4A1D-ABB2-A664A7BFE3D4}"/>
+                </c:ext>
+              </c:extLst>
             </c:dLbl>
             <c:dLbl>
               <c:idx val="1"/>
@@ -682,6 +743,7 @@
                       <a:latin typeface="Arial"/>
                     </a:defRPr>
                   </a:pPr>
+                  <a:endParaRPr lang="zh-TW"/>
                 </a:p>
               </c:txPr>
               <c:showLegendKey val="0"/>
@@ -690,6 +752,12 @@
               <c:showSerName val="0"/>
               <c:showPercent val="1"/>
               <c:showBubbleSize val="0"/>
+              <c:extLst>
+                <c:ext xmlns:c15="http://schemas.microsoft.com/office/drawing/2012/chart" uri="{CE6537A1-D6FC-4f65-9D91-7224C49458BB}"/>
+                <c:ext xmlns:c16="http://schemas.microsoft.com/office/drawing/2014/chart" uri="{C3380CC4-5D6E-409C-BE32-E72D297353CC}">
+                  <c16:uniqueId val="{00000003-3285-4A1D-ABB2-A664A7BFE3D4}"/>
+                </c:ext>
+              </c:extLst>
             </c:dLbl>
             <c:dLbl>
               <c:idx val="2"/>
@@ -707,6 +775,7 @@
                       <a:latin typeface="Arial"/>
                     </a:defRPr>
                   </a:pPr>
+                  <a:endParaRPr lang="zh-TW"/>
                 </a:p>
               </c:txPr>
               <c:showLegendKey val="0"/>
@@ -715,6 +784,12 @@
               <c:showSerName val="0"/>
               <c:showPercent val="1"/>
               <c:showBubbleSize val="0"/>
+              <c:extLst>
+                <c:ext xmlns:c15="http://schemas.microsoft.com/office/drawing/2012/chart" uri="{CE6537A1-D6FC-4f65-9D91-7224C49458BB}"/>
+                <c:ext xmlns:c16="http://schemas.microsoft.com/office/drawing/2014/chart" uri="{C3380CC4-5D6E-409C-BE32-E72D297353CC}">
+                  <c16:uniqueId val="{00000005-3285-4A1D-ABB2-A664A7BFE3D4}"/>
+                </c:ext>
+              </c:extLst>
             </c:dLbl>
             <c:dLbl>
               <c:idx val="3"/>
@@ -732,6 +807,7 @@
                       <a:latin typeface="Arial"/>
                     </a:defRPr>
                   </a:pPr>
+                  <a:endParaRPr lang="zh-TW"/>
                 </a:p>
               </c:txPr>
               <c:showLegendKey val="0"/>
@@ -740,6 +816,12 @@
               <c:showSerName val="0"/>
               <c:showPercent val="1"/>
               <c:showBubbleSize val="0"/>
+              <c:extLst>
+                <c:ext xmlns:c15="http://schemas.microsoft.com/office/drawing/2012/chart" uri="{CE6537A1-D6FC-4f65-9D91-7224C49458BB}"/>
+                <c:ext xmlns:c16="http://schemas.microsoft.com/office/drawing/2014/chart" uri="{C3380CC4-5D6E-409C-BE32-E72D297353CC}">
+                  <c16:uniqueId val="{00000007-3285-4A1D-ABB2-A664A7BFE3D4}"/>
+                </c:ext>
+              </c:extLst>
             </c:dLbl>
             <c:dLbl>
               <c:idx val="4"/>
@@ -757,6 +839,7 @@
                       <a:latin typeface="Arial"/>
                     </a:defRPr>
                   </a:pPr>
+                  <a:endParaRPr lang="zh-TW"/>
                 </a:p>
               </c:txPr>
               <c:showLegendKey val="0"/>
@@ -765,6 +848,12 @@
               <c:showSerName val="0"/>
               <c:showPercent val="1"/>
               <c:showBubbleSize val="0"/>
+              <c:extLst>
+                <c:ext xmlns:c15="http://schemas.microsoft.com/office/drawing/2012/chart" uri="{CE6537A1-D6FC-4f65-9D91-7224C49458BB}"/>
+                <c:ext xmlns:c16="http://schemas.microsoft.com/office/drawing/2014/chart" uri="{C3380CC4-5D6E-409C-BE32-E72D297353CC}">
+                  <c16:uniqueId val="{00000009-3285-4A1D-ABB2-A664A7BFE3D4}"/>
+                </c:ext>
+              </c:extLst>
             </c:dLbl>
             <c:dLbl>
               <c:idx val="5"/>
@@ -782,6 +871,7 @@
                       <a:latin typeface="Arial"/>
                     </a:defRPr>
                   </a:pPr>
+                  <a:endParaRPr lang="zh-TW"/>
                 </a:p>
               </c:txPr>
               <c:showLegendKey val="0"/>
@@ -790,8 +880,21 @@
               <c:showSerName val="0"/>
               <c:showPercent val="1"/>
               <c:showBubbleSize val="0"/>
+              <c:extLst>
+                <c:ext xmlns:c15="http://schemas.microsoft.com/office/drawing/2012/chart" uri="{CE6537A1-D6FC-4f65-9D91-7224C49458BB}"/>
+                <c:ext xmlns:c16="http://schemas.microsoft.com/office/drawing/2014/chart" uri="{C3380CC4-5D6E-409C-BE32-E72D297353CC}">
+                  <c16:uniqueId val="{0000000B-3285-4A1D-ABB2-A664A7BFE3D4}"/>
+                </c:ext>
+              </c:extLst>
             </c:dLbl>
             <c:numFmt formatCode="0%" sourceLinked="0"/>
+            <c:spPr>
+              <a:noFill/>
+              <a:ln>
+                <a:noFill/>
+              </a:ln>
+              <a:effectLst/>
+            </c:spPr>
             <c:txPr>
               <a:bodyPr/>
               <a:lstStyle/>
@@ -804,6 +907,7 @@
                     <a:latin typeface="Arial"/>
                   </a:defRPr>
                 </a:pPr>
+                <a:endParaRPr lang="zh-TW"/>
               </a:p>
             </c:txPr>
             <c:dLblPos val="ctr"/>
@@ -814,6 +918,9 @@
             <c:showPercent val="1"/>
             <c:showBubbleSize val="0"/>
             <c:showLeaderLines val="0"/>
+            <c:extLst>
+              <c:ext xmlns:c15="http://schemas.microsoft.com/office/drawing/2012/chart" uri="{CE6537A1-D6FC-4f65-9D91-7224C49458BB}"/>
+            </c:extLst>
           </c:dLbls>
           <c:cat>
             <c:strRef>
@@ -845,6 +952,7 @@
             <c:numRef>
               <c:f>Sheet1!$B$2:$B$7</c:f>
               <c:numCache>
+                <c:formatCode>General</c:formatCode>
                 <c:ptCount val="6"/>
                 <c:pt idx="0">
                   <c:v>47</c:v>
@@ -867,7 +975,21 @@
               </c:numCache>
             </c:numRef>
           </c:val>
+          <c:extLst>
+            <c:ext xmlns:c16="http://schemas.microsoft.com/office/drawing/2014/chart" uri="{C3380CC4-5D6E-409C-BE32-E72D297353CC}">
+              <c16:uniqueId val="{0000000C-3285-4A1D-ABB2-A664A7BFE3D4}"/>
+            </c:ext>
+          </c:extLst>
         </c:ser>
+        <c:dLbls>
+          <c:showLegendKey val="0"/>
+          <c:showVal val="0"/>
+          <c:showCatName val="0"/>
+          <c:showSerName val="0"/>
+          <c:showPercent val="0"/>
+          <c:showBubbleSize val="0"/>
+          <c:showLeaderLines val="0"/>
+        </c:dLbls>
         <c:firstSliceAng val="0"/>
       </c:pieChart>
       <c:spPr>
@@ -880,6 +1002,7 @@
     </c:plotArea>
     <c:plotVisOnly val="1"/>
     <c:dispBlanksAs val="span"/>
+    <c:showDLblsOverMax val="1"/>
   </c:chart>
   <c:spPr>
     <a:noFill/>
@@ -916,234 +1039,10 @@
           <a:chExt cx="0" cy="0"/>
         </a:xfrm>
       </p:grpSpPr>
-      <p:sp>
-        <p:nvSpPr>
-          <p:cNvPr id="2" name="Header Placeholder 1"/>
-          <p:cNvSpPr>
-            <a:spLocks noGrp="1"/>
-          </p:cNvSpPr>
-          <p:nvPr>
-            <p:ph type="hdr" sz="quarter"/>
-          </p:nvPr>
-        </p:nvSpPr>
-        <p:spPr>
-          <a:xfrm>
-            <a:off x="0" y="0"/>
-            <a:ext cx="2971800" cy="458788"/>
-          </a:xfrm>
-          <a:prstGeom prst="rect">
-            <a:avLst/>
-          </a:prstGeom>
-        </p:spPr>
-        <p:txBody>
-          <a:bodyPr vert="horz" lIns="91440" tIns="45720" rIns="91440" bIns="45720" rtlCol="0"/>
-          <a:lstStyle>
-            <a:lvl1pPr algn="l">
-              <a:defRPr sz="1200"/>
-            </a:lvl1pPr>
-          </a:lstStyle>
-          <a:p>
-            <a:endParaRPr lang="en-US"/>
-          </a:p>
-        </p:txBody>
-      </p:sp>
-      <p:sp>
-        <p:nvSpPr>
-          <p:cNvPr id="3" name="Date Placeholder 2"/>
-          <p:cNvSpPr>
-            <a:spLocks noGrp="1"/>
-          </p:cNvSpPr>
-          <p:nvPr>
-            <p:ph type="dt" idx="1"/>
-          </p:nvPr>
-        </p:nvSpPr>
-        <p:spPr>
-          <a:xfrm>
-            <a:off x="3884613" y="0"/>
-            <a:ext cx="2971800" cy="458788"/>
-          </a:xfrm>
-          <a:prstGeom prst="rect">
-            <a:avLst/>
-          </a:prstGeom>
-        </p:spPr>
-        <p:txBody>
-          <a:bodyPr vert="horz" lIns="91440" tIns="45720" rIns="91440" bIns="45720" rtlCol="0"/>
-          <a:lstStyle>
-            <a:lvl1pPr algn="r">
-              <a:defRPr sz="1200"/>
-            </a:lvl1pPr>
-          </a:lstStyle>
-          <a:p>
-            <a:fld id="{5282F153-3F37-0F45-9E97-73ACFA13230C}" type="datetimeFigureOut">
-              <a:rPr lang="en-US"/>
-              <a:t>7/23/19</a:t>
-            </a:fld>
-            <a:endParaRPr lang="en-US"/>
-          </a:p>
-        </p:txBody>
-      </p:sp>
-      <p:sp>
-        <p:nvSpPr>
-          <p:cNvPr id="4" name="Slide Image Placeholder 3"/>
-          <p:cNvSpPr>
-            <a:spLocks noGrp="1" noRot="1" noChangeAspect="1"/>
-          </p:cNvSpPr>
-          <p:nvPr>
-            <p:ph type="sldImg" idx="2"/>
-          </p:nvPr>
-        </p:nvSpPr>
-        <p:spPr>
-          <a:xfrm>
-            <a:off x="685800" y="1143000"/>
-            <a:ext cx="5486400" cy="3086100"/>
-          </a:xfrm>
-          <a:prstGeom prst="rect">
-            <a:avLst/>
-          </a:prstGeom>
-          <a:noFill/>
-          <a:ln w="12700">
-            <a:solidFill>
-              <a:prstClr val="black"/>
-            </a:solidFill>
-          </a:ln>
-        </p:spPr>
-        <p:txBody>
-          <a:bodyPr vert="horz" lIns="91440" tIns="45720" rIns="91440" bIns="45720" rtlCol="0" anchor="ctr"/>
-          <a:lstStyle/>
-          <a:p>
-            <a:endParaRPr lang="en-US"/>
-          </a:p>
-        </p:txBody>
-      </p:sp>
-      <p:sp>
-        <p:nvSpPr>
-          <p:cNvPr id="5" name="Notes Placeholder 4"/>
-          <p:cNvSpPr>
-            <a:spLocks noGrp="1"/>
-          </p:cNvSpPr>
-          <p:nvPr>
-            <p:ph type="body" sz="quarter" idx="3"/>
-          </p:nvPr>
-        </p:nvSpPr>
-        <p:spPr>
-          <a:xfrm>
-            <a:off x="685800" y="4400550"/>
-            <a:ext cx="5486400" cy="3600450"/>
-          </a:xfrm>
-          <a:prstGeom prst="rect">
-            <a:avLst/>
-          </a:prstGeom>
-        </p:spPr>
-        <p:txBody>
-          <a:bodyPr vert="horz" lIns="91440" tIns="45720" rIns="91440" bIns="45720" rtlCol="0"/>
-          <a:lstStyle/>
-          <a:p>
-            <a:pPr lvl="0"/>
-            <a:r>
-              <a:rPr lang="en-US"/>
-              <a:t>Click to edit Master text styles</a:t>
-            </a:r>
-          </a:p>
-          <a:p>
-            <a:pPr lvl="1"/>
-            <a:r>
-              <a:rPr lang="en-US"/>
-              <a:t>Second level</a:t>
-            </a:r>
-          </a:p>
-          <a:p>
-            <a:pPr lvl="2"/>
-            <a:r>
-              <a:rPr lang="en-US"/>
-              <a:t>Third level</a:t>
-            </a:r>
-          </a:p>
-          <a:p>
-            <a:pPr lvl="3"/>
-            <a:r>
-              <a:rPr lang="en-US"/>
-              <a:t>Fourth level</a:t>
-            </a:r>
-          </a:p>
-          <a:p>
-            <a:pPr lvl="4"/>
-            <a:r>
-              <a:rPr lang="en-US"/>
-              <a:t>Fifth level</a:t>
-            </a:r>
-          </a:p>
-        </p:txBody>
-      </p:sp>
-      <p:sp>
-        <p:nvSpPr>
-          <p:cNvPr id="6" name="Footer Placeholder 5"/>
-          <p:cNvSpPr>
-            <a:spLocks noGrp="1"/>
-          </p:cNvSpPr>
-          <p:nvPr>
-            <p:ph type="ftr" sz="quarter" idx="4"/>
-          </p:nvPr>
-        </p:nvSpPr>
-        <p:spPr>
-          <a:xfrm>
-            <a:off x="0" y="8685213"/>
-            <a:ext cx="2971800" cy="458787"/>
-          </a:xfrm>
-          <a:prstGeom prst="rect">
-            <a:avLst/>
-          </a:prstGeom>
-        </p:spPr>
-        <p:txBody>
-          <a:bodyPr vert="horz" lIns="91440" tIns="45720" rIns="91440" bIns="45720" rtlCol="0" anchor="b"/>
-          <a:lstStyle>
-            <a:lvl1pPr algn="l">
-              <a:defRPr sz="1200"/>
-            </a:lvl1pPr>
-          </a:lstStyle>
-          <a:p>
-            <a:endParaRPr lang="en-US"/>
-          </a:p>
-        </p:txBody>
-      </p:sp>
-      <p:sp>
-        <p:nvSpPr>
-          <p:cNvPr id="7" name="Slide Number Placeholder 6"/>
-          <p:cNvSpPr>
-            <a:spLocks noGrp="1"/>
-          </p:cNvSpPr>
-          <p:nvPr>
-            <p:ph type="sldNum" sz="quarter" idx="5"/>
-          </p:nvPr>
-        </p:nvSpPr>
-        <p:spPr>
-          <a:xfrm>
-            <a:off x="3884613" y="8685213"/>
-            <a:ext cx="2971800" cy="458787"/>
-          </a:xfrm>
-          <a:prstGeom prst="rect">
-            <a:avLst/>
-          </a:prstGeom>
-        </p:spPr>
-        <p:txBody>
-          <a:bodyPr vert="horz" lIns="91440" tIns="45720" rIns="91440" bIns="45720" rtlCol="0" anchor="b"/>
-          <a:lstStyle>
-            <a:lvl1pPr algn="r">
-              <a:defRPr sz="1200"/>
-            </a:lvl1pPr>
-          </a:lstStyle>
-          <a:p>
-            <a:fld id="{CE5E9CC1-C706-0F49-92D6-E571CC5EEA8F}" type="slidenum">
-              <a:rPr lang="en-US"/>
-              <a:t>‹#›</a:t>
-            </a:fld>
-            <a:endParaRPr lang="en-US"/>
-          </a:p>
-        </p:txBody>
-      </p:sp>
     </p:spTree>
     <p:extLst>
       <p:ext uri="{BB962C8B-B14F-4D97-AF65-F5344CB8AC3E}">
-        <p14:creationId xmlns:p14="http://schemas.microsoft.com/office/powerpoint/2010/main" val="1024086991"/>
+        <p14:creationId xmlns:p14="http://schemas.microsoft.com/office/powerpoint/2010/main" val="516140144"/>
       </p:ext>
     </p:extLst>
   </p:cSld>
@@ -1287,10 +1186,6 @@
           <a:bodyPr/>
           <a:lstStyle/>
           <a:p>
-            <a:r>
-              <a:rPr lang="en-US" dirty="0"/>
-              <a:t/>
-            </a:r>
             <a:endParaRPr lang="en-US" dirty="0"/>
           </a:p>
         </p:txBody>
@@ -1375,10 +1270,6 @@
           <a:bodyPr/>
           <a:lstStyle/>
           <a:p>
-            <a:r>
-              <a:rPr lang="en-US" dirty="0"/>
-              <a:t/>
-            </a:r>
             <a:endParaRPr lang="en-US" dirty="0"/>
           </a:p>
         </p:txBody>
@@ -1452,6 +1343,11 @@
 <file path=ppt/slideMasters/slideMaster1.xml><?xml version="1.0" encoding="utf-8"?>
 <p:sldMaster xmlns:a="http://schemas.openxmlformats.org/drawingml/2006/main" xmlns:r="http://schemas.openxmlformats.org/officeDocument/2006/relationships" xmlns:p="http://schemas.openxmlformats.org/presentationml/2006/main">
   <p:cSld>
+    <p:bg>
+      <p:bgRef idx="1001">
+        <a:schemeClr val="bg1"/>
+      </p:bgRef>
+    </p:bg>
     <p:spTree>
       <p:nvGrpSpPr>
         <p:cNvPr id="1" name=""/>
@@ -1734,6 +1630,7 @@
         <a:solidFill>
           <a:srgbClr val="FFFFFF"/>
         </a:solidFill>
+        <a:effectLst/>
       </p:bgPr>
     </p:bg>
     <p:spTree>
@@ -1771,7 +1668,7 @@
           <a:bodyPr wrap="square" rtlCol="0" anchor="ctr"/>
           <a:lstStyle/>
           <a:p>
-            <a:pPr indent="0" marL="0">
+            <a:pPr marL="0" indent="0">
               <a:buNone/>
             </a:pPr>
             <a:r>
@@ -1808,6 +1705,13 @@
           </a:solidFill>
           <a:ln/>
         </p:spPr>
+        <p:txBody>
+          <a:bodyPr/>
+          <a:lstStyle/>
+          <a:p>
+            <a:endParaRPr lang="zh-TW" altLang="en-US"/>
+          </a:p>
+        </p:txBody>
       </p:sp>
       <p:sp>
         <p:nvSpPr>
@@ -1830,7 +1734,7 @@
           <a:bodyPr wrap="square" rtlCol="0" anchor="ctr"/>
           <a:lstStyle/>
           <a:p>
-            <a:pPr indent="0" marL="0">
+            <a:pPr marL="0" indent="0">
               <a:buNone/>
             </a:pPr>
             <a:r>
@@ -1850,48 +1754,102 @@
       </p:sp>
       <p:graphicFrame>
         <p:nvGraphicFramePr>
-          <p:cNvPr id="2" name="Table 0"/>
+          <p:cNvPr id="5" name="Table 0"/>
           <p:cNvGraphicFramePr>
             <a:graphicFrameLocks noGrp="1"/>
           </p:cNvGraphicFramePr>
           <p:nvPr>
             <p:extLst>
               <p:ext uri="{D42A27DB-BD31-4B8C-83A1-F6EECF244321}">
-                <p14:modId xmlns:p14="http://schemas.microsoft.com/office/powerpoint/2010/main" val="1579011935"/>
+                <p14:modId xmlns:p14="http://schemas.microsoft.com/office/powerpoint/2010/main" val="1621045861"/>
               </p:ext>
             </p:extLst>
           </p:nvPr>
         </p:nvGraphicFramePr>
         <p:xfrm>
-          <a:off x="164592" y="548640"/>
-          <a:ext cx="8814816" cy="1792224"/>
+          <a:off x="164592" y="548639"/>
+          <a:ext cx="8851391" cy="1856253"/>
         </p:xfrm>
         <a:graphic>
           <a:graphicData uri="http://schemas.openxmlformats.org/drawingml/2006/table">
             <a:tbl>
               <a:tblPr/>
               <a:tblGrid>
-                <a:gridCol w="960120"/>
-                <a:gridCol w="1051560"/>
-                <a:gridCol w="1005840"/>
-                <a:gridCol w="1005840"/>
-                <a:gridCol w="1005840"/>
-                <a:gridCol w="804672"/>
-                <a:gridCol w="804672"/>
-                <a:gridCol w="804672"/>
-                <a:gridCol w="768096"/>
+                <a:gridCol w="1034962">
+                  <a:extLst>
+                    <a:ext uri="{9D8B030D-6E8A-4147-A177-3AD203B41FA5}">
+                      <a16:colId xmlns:a16="http://schemas.microsoft.com/office/drawing/2014/main" val="20000"/>
+                    </a:ext>
+                  </a:extLst>
+                </a:gridCol>
+                <a:gridCol w="1133530">
+                  <a:extLst>
+                    <a:ext uri="{9D8B030D-6E8A-4147-A177-3AD203B41FA5}">
+                      <a16:colId xmlns:a16="http://schemas.microsoft.com/office/drawing/2014/main" val="20001"/>
+                    </a:ext>
+                  </a:extLst>
+                </a:gridCol>
+                <a:gridCol w="1084246">
+                  <a:extLst>
+                    <a:ext uri="{9D8B030D-6E8A-4147-A177-3AD203B41FA5}">
+                      <a16:colId xmlns:a16="http://schemas.microsoft.com/office/drawing/2014/main" val="20002"/>
+                    </a:ext>
+                  </a:extLst>
+                </a:gridCol>
+                <a:gridCol w="1084246">
+                  <a:extLst>
+                    <a:ext uri="{9D8B030D-6E8A-4147-A177-3AD203B41FA5}">
+                      <a16:colId xmlns:a16="http://schemas.microsoft.com/office/drawing/2014/main" val="20003"/>
+                    </a:ext>
+                  </a:extLst>
+                </a:gridCol>
+                <a:gridCol w="1084246">
+                  <a:extLst>
+                    <a:ext uri="{9D8B030D-6E8A-4147-A177-3AD203B41FA5}">
+                      <a16:colId xmlns:a16="http://schemas.microsoft.com/office/drawing/2014/main" val="20004"/>
+                    </a:ext>
+                  </a:extLst>
+                </a:gridCol>
+                <a:gridCol w="867397">
+                  <a:extLst>
+                    <a:ext uri="{9D8B030D-6E8A-4147-A177-3AD203B41FA5}">
+                      <a16:colId xmlns:a16="http://schemas.microsoft.com/office/drawing/2014/main" val="20005"/>
+                    </a:ext>
+                  </a:extLst>
+                </a:gridCol>
+                <a:gridCol w="867397">
+                  <a:extLst>
+                    <a:ext uri="{9D8B030D-6E8A-4147-A177-3AD203B41FA5}">
+                      <a16:colId xmlns:a16="http://schemas.microsoft.com/office/drawing/2014/main" val="20006"/>
+                    </a:ext>
+                  </a:extLst>
+                </a:gridCol>
+                <a:gridCol w="867397">
+                  <a:extLst>
+                    <a:ext uri="{9D8B030D-6E8A-4147-A177-3AD203B41FA5}">
+                      <a16:colId xmlns:a16="http://schemas.microsoft.com/office/drawing/2014/main" val="20007"/>
+                    </a:ext>
+                  </a:extLst>
+                </a:gridCol>
+                <a:gridCol w="827970">
+                  <a:extLst>
+                    <a:ext uri="{9D8B030D-6E8A-4147-A177-3AD203B41FA5}">
+                      <a16:colId xmlns:a16="http://schemas.microsoft.com/office/drawing/2014/main" val="20008"/>
+                    </a:ext>
+                  </a:extLst>
+                </a:gridCol>
               </a:tblGrid>
-              <a:tr h="338328">
+              <a:tr h="364701">
                 <a:tc>
                   <a:txBody>
                     <a:bodyPr/>
                     <a:lstStyle/>
                     <a:p>
-                      <a:pPr algn="ctr" indent="0" marL="0">
+                      <a:pPr marL="0" indent="0" algn="ctr">
                         <a:buNone/>
                       </a:pPr>
                       <a:r>
-                        <a:rPr lang="en-US" sz="850" b="1" dirty="0">
+                        <a:rPr lang="en-US" sz="900" b="1" dirty="0">
                           <a:solidFill>
                             <a:srgbClr val="FFFFFF"/>
                           </a:solidFill>
@@ -1901,14 +1859,14 @@
                         </a:rPr>
                         <a:t>週次/期間</a:t>
                       </a:r>
-                      <a:endParaRPr lang="en-US" sz="850" dirty="0">
+                      <a:endParaRPr lang="en-US" sz="900" dirty="0">
                         <a:latin typeface="Noto Sans TC" charset="0"/>
                         <a:ea typeface="Noto Sans TC" charset="0"/>
                         <a:cs typeface="Noto Sans TC" charset="0"/>
                       </a:endParaRPr>
                     </a:p>
                   </a:txBody>
-                  <a:tcPr marL="91440" marR="91440" marT="45720" marB="45720">
+                  <a:tcPr marL="98568" marR="98568" marT="49284" marB="49284">
                     <a:lnL w="6350" cap="flat" cmpd="sng" algn="ctr">
                       <a:solidFill>
                         <a:srgbClr val="D1DCF0"/>
@@ -1955,11 +1913,11 @@
                     <a:bodyPr/>
                     <a:lstStyle/>
                     <a:p>
-                      <a:pPr algn="ctr" indent="0" marL="0">
+                      <a:pPr marL="0" indent="0" algn="ctr">
                         <a:buNone/>
                       </a:pPr>
                       <a:r>
-                        <a:rPr lang="en-US" sz="800" b="1" dirty="0">
+                        <a:rPr lang="en-US" sz="900" b="1" dirty="0">
                           <a:solidFill>
                             <a:srgbClr val="FFFFFF"/>
                           </a:solidFill>
@@ -1969,14 +1927,14 @@
                         </a:rPr>
                         <a:t>收瓶機/方舟</a:t>
                       </a:r>
-                      <a:endParaRPr lang="en-US" sz="800" dirty="0">
+                      <a:endParaRPr lang="en-US" sz="900" dirty="0">
                         <a:latin typeface="Noto Sans TC" charset="0"/>
                         <a:ea typeface="Noto Sans TC" charset="0"/>
                         <a:cs typeface="Noto Sans TC" charset="0"/>
                       </a:endParaRPr>
                     </a:p>
                   </a:txBody>
-                  <a:tcPr marL="91440" marR="91440" marT="45720" marB="45720">
+                  <a:tcPr marL="98568" marR="98568" marT="49284" marB="49284">
                     <a:lnL w="6350" cap="flat" cmpd="sng" algn="ctr">
                       <a:solidFill>
                         <a:srgbClr val="D1DCF0"/>
@@ -2023,11 +1981,11 @@
                     <a:bodyPr/>
                     <a:lstStyle/>
                     <a:p>
-                      <a:pPr algn="ctr" indent="0" marL="0">
+                      <a:pPr marL="0" indent="0" algn="ctr">
                         <a:buNone/>
                       </a:pPr>
                       <a:r>
-                        <a:rPr lang="en-US" sz="800" b="1" dirty="0">
+                        <a:rPr lang="en-US" sz="900" b="1" dirty="0">
                           <a:solidFill>
                             <a:srgbClr val="FFFFFF"/>
                           </a:solidFill>
@@ -2037,14 +1995,14 @@
                         </a:rPr>
                         <a:t>二代電池機</a:t>
                       </a:r>
-                      <a:endParaRPr lang="en-US" sz="800" dirty="0">
+                      <a:endParaRPr lang="en-US" sz="900" dirty="0">
                         <a:latin typeface="Noto Sans TC" charset="0"/>
                         <a:ea typeface="Noto Sans TC" charset="0"/>
                         <a:cs typeface="Noto Sans TC" charset="0"/>
                       </a:endParaRPr>
                     </a:p>
                   </a:txBody>
-                  <a:tcPr marL="91440" marR="91440" marT="45720" marB="45720">
+                  <a:tcPr marL="98568" marR="98568" marT="49284" marB="49284">
                     <a:lnL w="6350" cap="flat" cmpd="sng" algn="ctr">
                       <a:solidFill>
                         <a:srgbClr val="D1DCF0"/>
@@ -2091,11 +2049,11 @@
                     <a:bodyPr/>
                     <a:lstStyle/>
                     <a:p>
-                      <a:pPr algn="ctr" indent="0" marL="0">
+                      <a:pPr marL="0" indent="0" algn="ctr">
                         <a:buNone/>
                       </a:pPr>
                       <a:r>
-                        <a:rPr lang="en-US" sz="800" b="1" dirty="0">
+                        <a:rPr lang="en-US" sz="900" b="1" dirty="0">
                           <a:solidFill>
                             <a:srgbClr val="FFFFFF"/>
                           </a:solidFill>
@@ -2105,14 +2063,14 @@
                         </a:rPr>
                         <a:t>註冊帳號</a:t>
                       </a:r>
-                      <a:endParaRPr lang="en-US" sz="800" dirty="0">
+                      <a:endParaRPr lang="en-US" sz="900" dirty="0">
                         <a:latin typeface="Noto Sans TC" charset="0"/>
                         <a:ea typeface="Noto Sans TC" charset="0"/>
                         <a:cs typeface="Noto Sans TC" charset="0"/>
                       </a:endParaRPr>
                     </a:p>
                   </a:txBody>
-                  <a:tcPr marL="91440" marR="91440" marT="45720" marB="45720">
+                  <a:tcPr marL="98568" marR="98568" marT="49284" marB="49284">
                     <a:lnL w="6350" cap="flat" cmpd="sng" algn="ctr">
                       <a:solidFill>
                         <a:srgbClr val="D1DCF0"/>
@@ -2159,11 +2117,11 @@
                     <a:bodyPr/>
                     <a:lstStyle/>
                     <a:p>
-                      <a:pPr algn="ctr" indent="0" marL="0">
+                      <a:pPr marL="0" indent="0" algn="ctr">
                         <a:buNone/>
                       </a:pPr>
                       <a:r>
-                        <a:rPr lang="en-US" sz="800" b="1" dirty="0">
+                        <a:rPr lang="en-US" sz="900" b="1" dirty="0">
                           <a:solidFill>
                             <a:srgbClr val="FFFFFF"/>
                           </a:solidFill>
@@ -2173,14 +2131,14 @@
                         </a:rPr>
                         <a:t>回收點數</a:t>
                       </a:r>
-                      <a:endParaRPr lang="en-US" sz="800" dirty="0">
+                      <a:endParaRPr lang="en-US" sz="900" dirty="0">
                         <a:latin typeface="Noto Sans TC" charset="0"/>
                         <a:ea typeface="Noto Sans TC" charset="0"/>
                         <a:cs typeface="Noto Sans TC" charset="0"/>
                       </a:endParaRPr>
                     </a:p>
                   </a:txBody>
-                  <a:tcPr marL="91440" marR="91440" marT="45720" marB="45720">
+                  <a:tcPr marL="98568" marR="98568" marT="49284" marB="49284">
                     <a:lnL w="6350" cap="flat" cmpd="sng" algn="ctr">
                       <a:solidFill>
                         <a:srgbClr val="D1DCF0"/>
@@ -2227,11 +2185,11 @@
                     <a:bodyPr/>
                     <a:lstStyle/>
                     <a:p>
-                      <a:pPr algn="ctr" indent="0" marL="0">
+                      <a:pPr marL="0" indent="0" algn="ctr">
                         <a:buNone/>
                       </a:pPr>
                       <a:r>
-                        <a:rPr lang="en-US" sz="800" b="1" dirty="0">
+                        <a:rPr lang="en-US" sz="900" b="1" dirty="0">
                           <a:solidFill>
                             <a:srgbClr val="FFFFFF"/>
                           </a:solidFill>
@@ -2241,14 +2199,14 @@
                         </a:rPr>
                         <a:t>優惠券</a:t>
                       </a:r>
-                      <a:endParaRPr lang="en-US" sz="800" dirty="0">
+                      <a:endParaRPr lang="en-US" sz="900" dirty="0">
                         <a:latin typeface="Noto Sans TC" charset="0"/>
                         <a:ea typeface="Noto Sans TC" charset="0"/>
                         <a:cs typeface="Noto Sans TC" charset="0"/>
                       </a:endParaRPr>
                     </a:p>
                   </a:txBody>
-                  <a:tcPr marL="91440" marR="91440" marT="45720" marB="45720">
+                  <a:tcPr marL="98568" marR="98568" marT="49284" marB="49284">
                     <a:lnL w="6350" cap="flat" cmpd="sng" algn="ctr">
                       <a:solidFill>
                         <a:srgbClr val="D1DCF0"/>
@@ -2295,11 +2253,11 @@
                     <a:bodyPr/>
                     <a:lstStyle/>
                     <a:p>
-                      <a:pPr algn="ctr" indent="0" marL="0">
+                      <a:pPr marL="0" indent="0" algn="ctr">
                         <a:buNone/>
                       </a:pPr>
                       <a:r>
-                        <a:rPr lang="en-US" sz="800" b="1" dirty="0">
+                        <a:rPr lang="en-US" sz="900" b="1" dirty="0">
                           <a:solidFill>
                             <a:srgbClr val="FFFFFF"/>
                           </a:solidFill>
@@ -2309,14 +2267,14 @@
                         </a:rPr>
                         <a:t>APP使用</a:t>
                       </a:r>
-                      <a:endParaRPr lang="en-US" sz="800" dirty="0">
+                      <a:endParaRPr lang="en-US" sz="900" dirty="0">
                         <a:latin typeface="Noto Sans TC" charset="0"/>
                         <a:ea typeface="Noto Sans TC" charset="0"/>
                         <a:cs typeface="Noto Sans TC" charset="0"/>
                       </a:endParaRPr>
                     </a:p>
                   </a:txBody>
-                  <a:tcPr marL="91440" marR="91440" marT="45720" marB="45720">
+                  <a:tcPr marL="98568" marR="98568" marT="49284" marB="49284">
                     <a:lnL w="6350" cap="flat" cmpd="sng" algn="ctr">
                       <a:solidFill>
                         <a:srgbClr val="D1DCF0"/>
@@ -2363,11 +2321,11 @@
                     <a:bodyPr/>
                     <a:lstStyle/>
                     <a:p>
-                      <a:pPr algn="ctr" indent="0" marL="0">
+                      <a:pPr marL="0" indent="0" algn="ctr">
                         <a:buNone/>
                       </a:pPr>
                       <a:r>
-                        <a:rPr lang="en-US" sz="800" b="1" dirty="0">
+                        <a:rPr lang="en-US" sz="900" b="1" dirty="0">
                           <a:solidFill>
                             <a:srgbClr val="FFFFFF"/>
                           </a:solidFill>
@@ -2377,14 +2335,14 @@
                         </a:rPr>
                         <a:t>顧客關係</a:t>
                       </a:r>
-                      <a:endParaRPr lang="en-US" sz="800" dirty="0">
+                      <a:endParaRPr lang="en-US" sz="900" dirty="0">
                         <a:latin typeface="Noto Sans TC" charset="0"/>
                         <a:ea typeface="Noto Sans TC" charset="0"/>
                         <a:cs typeface="Noto Sans TC" charset="0"/>
                       </a:endParaRPr>
                     </a:p>
                   </a:txBody>
-                  <a:tcPr marL="91440" marR="91440" marT="45720" marB="45720">
+                  <a:tcPr marL="98568" marR="98568" marT="49284" marB="49284">
                     <a:lnL w="6350" cap="flat" cmpd="sng" algn="ctr">
                       <a:solidFill>
                         <a:srgbClr val="D1DCF0"/>
@@ -2431,11 +2389,11 @@
                     <a:bodyPr/>
                     <a:lstStyle/>
                     <a:p>
-                      <a:pPr algn="ctr" indent="0" marL="0">
+                      <a:pPr marL="0" indent="0" algn="ctr">
                         <a:buNone/>
                       </a:pPr>
                       <a:r>
-                        <a:rPr lang="en-US" sz="800" b="1" dirty="0">
+                        <a:rPr lang="en-US" sz="900" b="1" dirty="0">
                           <a:solidFill>
                             <a:srgbClr val="FFFFFF"/>
                           </a:solidFill>
@@ -2445,14 +2403,14 @@
                         </a:rPr>
                         <a:t>加總</a:t>
                       </a:r>
-                      <a:endParaRPr lang="en-US" sz="800" dirty="0">
+                      <a:endParaRPr lang="en-US" sz="900" dirty="0">
                         <a:latin typeface="Noto Sans TC" charset="0"/>
                         <a:ea typeface="Noto Sans TC" charset="0"/>
                         <a:cs typeface="Noto Sans TC" charset="0"/>
                       </a:endParaRPr>
                     </a:p>
                   </a:txBody>
-                  <a:tcPr marL="91440" marR="91440" marT="45720" marB="45720">
+                  <a:tcPr marL="98568" marR="98568" marT="49284" marB="49284">
                     <a:lnL w="6350" cap="flat" cmpd="sng" algn="ctr">
                       <a:solidFill>
                         <a:srgbClr val="D1DCF0"/>
@@ -2494,18 +2452,23 @@
                     </a:solidFill>
                   </a:tcPr>
                 </a:tc>
+                <a:extLst>
+                  <a:ext uri="{0D108BD9-81ED-4DB2-BD59-A6C34878D82A}">
+                    <a16:rowId xmlns:a16="http://schemas.microsoft.com/office/drawing/2014/main" val="10000"/>
+                  </a:ext>
+                </a:extLst>
               </a:tr>
-              <a:tr h="338328">
+              <a:tr h="364701">
                 <a:tc>
                   <a:txBody>
                     <a:bodyPr/>
                     <a:lstStyle/>
                     <a:p>
-                      <a:pPr algn="ctr" indent="0" marL="0">
+                      <a:pPr marL="0" indent="0" algn="ctr">
                         <a:buNone/>
                       </a:pPr>
                       <a:r>
-                        <a:rPr lang="en-US" sz="800" dirty="0">
+                        <a:rPr lang="en-US" sz="900" dirty="0">
                           <a:solidFill>
                             <a:srgbClr val="555555"/>
                           </a:solidFill>
@@ -2515,18 +2478,18 @@
                         </a:rPr>
                         <a:t>26週</a:t>
                       </a:r>
-                      <a:endParaRPr lang="en-US" sz="800" dirty="0">
+                      <a:endParaRPr lang="en-US" sz="900" dirty="0">
                         <a:latin typeface="Noto Sans TC" charset="0"/>
                         <a:ea typeface="Noto Sans TC" charset="0"/>
                         <a:cs typeface="Noto Sans TC" charset="0"/>
                       </a:endParaRPr>
                     </a:p>
                     <a:p>
-                      <a:pPr algn="ctr" indent="0" marL="0">
+                      <a:pPr marL="0" indent="0" algn="ctr">
                         <a:buNone/>
                       </a:pPr>
                       <a:r>
-                        <a:rPr lang="en-US" sz="800" dirty="0">
+                        <a:rPr lang="en-US" sz="900" dirty="0">
                           <a:solidFill>
                             <a:srgbClr val="555555"/>
                           </a:solidFill>
@@ -2536,14 +2499,14 @@
                         </a:rPr>
                         <a:t>06/22-06/28</a:t>
                       </a:r>
-                      <a:endParaRPr lang="en-US" sz="800" dirty="0">
+                      <a:endParaRPr lang="en-US" sz="900" dirty="0">
                         <a:latin typeface="Noto Sans TC" charset="0"/>
                         <a:ea typeface="Noto Sans TC" charset="0"/>
                         <a:cs typeface="Noto Sans TC" charset="0"/>
                       </a:endParaRPr>
                     </a:p>
                   </a:txBody>
-                  <a:tcPr marL="91440" marR="91440" marT="45720" marB="45720" anchor="ctr">
+                  <a:tcPr marL="98568" marR="98568" marT="49284" marB="49284" anchor="ctr">
                     <a:lnL w="6350" cap="flat" cmpd="sng" algn="ctr">
                       <a:solidFill>
                         <a:srgbClr val="D1DCF0"/>
@@ -2590,11 +2553,11 @@
                     <a:bodyPr/>
                     <a:lstStyle/>
                     <a:p>
-                      <a:pPr algn="ctr" indent="0" marL="0">
+                      <a:pPr marL="0" indent="0" algn="ctr">
                         <a:buNone/>
                       </a:pPr>
                       <a:r>
-                        <a:rPr lang="en-US" sz="1000" dirty="0">
+                        <a:rPr lang="en-US" sz="1100" dirty="0">
                           <a:solidFill>
                             <a:srgbClr val="333333"/>
                           </a:solidFill>
@@ -2604,14 +2567,14 @@
                         </a:rPr>
                         <a:t>77</a:t>
                       </a:r>
-                      <a:endParaRPr lang="en-US" sz="1200" dirty="0">
+                      <a:endParaRPr lang="en-US" sz="1300" dirty="0">
                         <a:latin typeface="Noto Sans TC" charset="0"/>
                         <a:ea typeface="Noto Sans TC" charset="0"/>
                         <a:cs typeface="Noto Sans TC" charset="0"/>
                       </a:endParaRPr>
                     </a:p>
                   </a:txBody>
-                  <a:tcPr marL="91440" marR="91440" marT="45720" marB="45720" anchor="ctr">
+                  <a:tcPr marL="98568" marR="98568" marT="49284" marB="49284" anchor="ctr">
                     <a:lnL w="6350" cap="flat" cmpd="sng" algn="ctr">
                       <a:solidFill>
                         <a:srgbClr val="D1DCF0"/>
@@ -2658,11 +2621,11 @@
                     <a:bodyPr/>
                     <a:lstStyle/>
                     <a:p>
-                      <a:pPr algn="ctr" indent="0" marL="0">
+                      <a:pPr marL="0" indent="0" algn="ctr">
                         <a:buNone/>
                       </a:pPr>
                       <a:r>
-                        <a:rPr lang="en-US" sz="1000" dirty="0">
+                        <a:rPr lang="en-US" sz="1100" dirty="0">
                           <a:solidFill>
                             <a:srgbClr val="333333"/>
                           </a:solidFill>
@@ -2672,14 +2635,14 @@
                         </a:rPr>
                         <a:t>13</a:t>
                       </a:r>
-                      <a:endParaRPr lang="en-US" sz="1200" dirty="0">
+                      <a:endParaRPr lang="en-US" sz="1300" dirty="0">
                         <a:latin typeface="Noto Sans TC" charset="0"/>
                         <a:ea typeface="Noto Sans TC" charset="0"/>
                         <a:cs typeface="Noto Sans TC" charset="0"/>
                       </a:endParaRPr>
                     </a:p>
                   </a:txBody>
-                  <a:tcPr marL="91440" marR="91440" marT="45720" marB="45720" anchor="ctr">
+                  <a:tcPr marL="98568" marR="98568" marT="49284" marB="49284" anchor="ctr">
                     <a:lnL w="6350" cap="flat" cmpd="sng" algn="ctr">
                       <a:solidFill>
                         <a:srgbClr val="D1DCF0"/>
@@ -2726,11 +2689,11 @@
                     <a:bodyPr/>
                     <a:lstStyle/>
                     <a:p>
-                      <a:pPr algn="ctr" indent="0" marL="0">
+                      <a:pPr marL="0" indent="0" algn="ctr">
                         <a:buNone/>
                       </a:pPr>
                       <a:r>
-                        <a:rPr lang="en-US" sz="1000" dirty="0">
+                        <a:rPr lang="en-US" sz="1100" dirty="0">
                           <a:solidFill>
                             <a:srgbClr val="333333"/>
                           </a:solidFill>
@@ -2740,14 +2703,14 @@
                         </a:rPr>
                         <a:t>7</a:t>
                       </a:r>
-                      <a:endParaRPr lang="en-US" sz="1200" dirty="0">
+                      <a:endParaRPr lang="en-US" sz="1300" dirty="0">
                         <a:latin typeface="Noto Sans TC" charset="0"/>
                         <a:ea typeface="Noto Sans TC" charset="0"/>
                         <a:cs typeface="Noto Sans TC" charset="0"/>
                       </a:endParaRPr>
                     </a:p>
                   </a:txBody>
-                  <a:tcPr marL="91440" marR="91440" marT="45720" marB="45720" anchor="ctr">
+                  <a:tcPr marL="98568" marR="98568" marT="49284" marB="49284" anchor="ctr">
                     <a:lnL w="6350" cap="flat" cmpd="sng" algn="ctr">
                       <a:solidFill>
                         <a:srgbClr val="D1DCF0"/>
@@ -2794,11 +2757,11 @@
                     <a:bodyPr/>
                     <a:lstStyle/>
                     <a:p>
-                      <a:pPr algn="ctr" indent="0" marL="0">
+                      <a:pPr marL="0" indent="0" algn="ctr">
                         <a:buNone/>
                       </a:pPr>
                       <a:r>
-                        <a:rPr lang="en-US" sz="1000" dirty="0">
+                        <a:rPr lang="en-US" sz="1100" dirty="0">
                           <a:solidFill>
                             <a:srgbClr val="333333"/>
                           </a:solidFill>
@@ -2808,14 +2771,14 @@
                         </a:rPr>
                         <a:t>13</a:t>
                       </a:r>
-                      <a:endParaRPr lang="en-US" sz="1200" dirty="0">
+                      <a:endParaRPr lang="en-US" sz="1300" dirty="0">
                         <a:latin typeface="Noto Sans TC" charset="0"/>
                         <a:ea typeface="Noto Sans TC" charset="0"/>
                         <a:cs typeface="Noto Sans TC" charset="0"/>
                       </a:endParaRPr>
                     </a:p>
                   </a:txBody>
-                  <a:tcPr marL="91440" marR="91440" marT="45720" marB="45720" anchor="ctr">
+                  <a:tcPr marL="98568" marR="98568" marT="49284" marB="49284" anchor="ctr">
                     <a:lnL w="6350" cap="flat" cmpd="sng" algn="ctr">
                       <a:solidFill>
                         <a:srgbClr val="D1DCF0"/>
@@ -2862,11 +2825,11 @@
                     <a:bodyPr/>
                     <a:lstStyle/>
                     <a:p>
-                      <a:pPr algn="ctr" indent="0" marL="0">
+                      <a:pPr marL="0" indent="0" algn="ctr">
                         <a:buNone/>
                       </a:pPr>
                       <a:r>
-                        <a:rPr lang="en-US" sz="1000" dirty="0">
+                        <a:rPr lang="en-US" sz="1100" dirty="0">
                           <a:solidFill>
                             <a:srgbClr val="333333"/>
                           </a:solidFill>
@@ -2876,14 +2839,14 @@
                         </a:rPr>
                         <a:t>21</a:t>
                       </a:r>
-                      <a:endParaRPr lang="en-US" sz="1200" dirty="0">
+                      <a:endParaRPr lang="en-US" sz="1300" dirty="0">
                         <a:latin typeface="Noto Sans TC" charset="0"/>
                         <a:ea typeface="Noto Sans TC" charset="0"/>
                         <a:cs typeface="Noto Sans TC" charset="0"/>
                       </a:endParaRPr>
                     </a:p>
                   </a:txBody>
-                  <a:tcPr marL="91440" marR="91440" marT="45720" marB="45720" anchor="ctr">
+                  <a:tcPr marL="98568" marR="98568" marT="49284" marB="49284" anchor="ctr">
                     <a:lnL w="6350" cap="flat" cmpd="sng" algn="ctr">
                       <a:solidFill>
                         <a:srgbClr val="D1DCF0"/>
@@ -2930,11 +2893,11 @@
                     <a:bodyPr/>
                     <a:lstStyle/>
                     <a:p>
-                      <a:pPr algn="ctr" indent="0" marL="0">
+                      <a:pPr marL="0" indent="0" algn="ctr">
                         <a:buNone/>
                       </a:pPr>
                       <a:r>
-                        <a:rPr lang="en-US" sz="1000" dirty="0">
+                        <a:rPr lang="en-US" sz="1100" dirty="0">
                           <a:solidFill>
                             <a:srgbClr val="333333"/>
                           </a:solidFill>
@@ -2944,14 +2907,14 @@
                         </a:rPr>
                         <a:t>32</a:t>
                       </a:r>
-                      <a:endParaRPr lang="en-US" sz="1200" dirty="0">
+                      <a:endParaRPr lang="en-US" sz="1300" dirty="0">
                         <a:latin typeface="Noto Sans TC" charset="0"/>
                         <a:ea typeface="Noto Sans TC" charset="0"/>
                         <a:cs typeface="Noto Sans TC" charset="0"/>
                       </a:endParaRPr>
                     </a:p>
                   </a:txBody>
-                  <a:tcPr marL="91440" marR="91440" marT="45720" marB="45720" anchor="ctr">
+                  <a:tcPr marL="98568" marR="98568" marT="49284" marB="49284" anchor="ctr">
                     <a:lnL w="6350" cap="flat" cmpd="sng" algn="ctr">
                       <a:solidFill>
                         <a:srgbClr val="D1DCF0"/>
@@ -2998,11 +2961,11 @@
                     <a:bodyPr/>
                     <a:lstStyle/>
                     <a:p>
-                      <a:pPr algn="ctr" indent="0" marL="0">
+                      <a:pPr marL="0" indent="0" algn="ctr">
                         <a:buNone/>
                       </a:pPr>
                       <a:r>
-                        <a:rPr lang="en-US" sz="1000" dirty="0">
+                        <a:rPr lang="en-US" sz="1100" dirty="0">
                           <a:solidFill>
                             <a:srgbClr val="333333"/>
                           </a:solidFill>
@@ -3012,14 +2975,14 @@
                         </a:rPr>
                         <a:t>16</a:t>
                       </a:r>
-                      <a:endParaRPr lang="en-US" sz="1200" dirty="0">
+                      <a:endParaRPr lang="en-US" sz="1300" dirty="0">
                         <a:latin typeface="Noto Sans TC" charset="0"/>
                         <a:ea typeface="Noto Sans TC" charset="0"/>
                         <a:cs typeface="Noto Sans TC" charset="0"/>
                       </a:endParaRPr>
                     </a:p>
                   </a:txBody>
-                  <a:tcPr marL="91440" marR="91440" marT="45720" marB="45720" anchor="ctr">
+                  <a:tcPr marL="98568" marR="98568" marT="49284" marB="49284" anchor="ctr">
                     <a:lnL w="6350" cap="flat" cmpd="sng" algn="ctr">
                       <a:solidFill>
                         <a:srgbClr val="D1DCF0"/>
@@ -3066,11 +3029,11 @@
                     <a:bodyPr/>
                     <a:lstStyle/>
                     <a:p>
-                      <a:pPr algn="ctr" indent="0" marL="0">
+                      <a:pPr marL="0" indent="0" algn="ctr">
                         <a:buNone/>
                       </a:pPr>
                       <a:r>
-                        <a:rPr lang="en-US" sz="1100" b="1" dirty="0">
+                        <a:rPr lang="en-US" sz="1200" b="1" dirty="0">
                           <a:solidFill>
                             <a:srgbClr val="FF5000"/>
                           </a:solidFill>
@@ -3080,14 +3043,14 @@
                         </a:rPr>
                         <a:t>158</a:t>
                       </a:r>
-                      <a:endParaRPr lang="en-US" sz="1200" dirty="0">
+                      <a:endParaRPr lang="en-US" sz="1300" dirty="0">
                         <a:latin typeface="Noto Sans TC" charset="0"/>
                         <a:ea typeface="Noto Sans TC" charset="0"/>
                         <a:cs typeface="Noto Sans TC" charset="0"/>
                       </a:endParaRPr>
                     </a:p>
                   </a:txBody>
-                  <a:tcPr marL="91440" marR="91440" marT="45720" marB="45720" anchor="ctr">
+                  <a:tcPr marL="98568" marR="98568" marT="49284" marB="49284" anchor="ctr">
                     <a:lnL w="6350" cap="flat" cmpd="sng" algn="ctr">
                       <a:solidFill>
                         <a:srgbClr val="D1DCF0"/>
@@ -3129,18 +3092,23 @@
                     </a:solidFill>
                   </a:tcPr>
                 </a:tc>
+                <a:extLst>
+                  <a:ext uri="{0D108BD9-81ED-4DB2-BD59-A6C34878D82A}">
+                    <a16:rowId xmlns:a16="http://schemas.microsoft.com/office/drawing/2014/main" val="10001"/>
+                  </a:ext>
+                </a:extLst>
               </a:tr>
-              <a:tr h="338328">
+              <a:tr h="364701">
                 <a:tc>
                   <a:txBody>
                     <a:bodyPr/>
                     <a:lstStyle/>
                     <a:p>
-                      <a:pPr algn="ctr" indent="0" marL="0">
+                      <a:pPr marL="0" indent="0" algn="ctr">
                         <a:buNone/>
                       </a:pPr>
                       <a:r>
-                        <a:rPr lang="en-US" sz="800" dirty="0">
+                        <a:rPr lang="en-US" sz="900" dirty="0">
                           <a:solidFill>
                             <a:srgbClr val="555555"/>
                           </a:solidFill>
@@ -3150,18 +3118,18 @@
                         </a:rPr>
                         <a:t>27週</a:t>
                       </a:r>
-                      <a:endParaRPr lang="en-US" sz="800" dirty="0">
+                      <a:endParaRPr lang="en-US" sz="900" dirty="0">
                         <a:latin typeface="Noto Sans TC" charset="0"/>
                         <a:ea typeface="Noto Sans TC" charset="0"/>
                         <a:cs typeface="Noto Sans TC" charset="0"/>
                       </a:endParaRPr>
                     </a:p>
                     <a:p>
-                      <a:pPr algn="ctr" indent="0" marL="0">
+                      <a:pPr marL="0" indent="0" algn="ctr">
                         <a:buNone/>
                       </a:pPr>
                       <a:r>
-                        <a:rPr lang="en-US" sz="800" dirty="0">
+                        <a:rPr lang="en-US" sz="900" dirty="0">
                           <a:solidFill>
                             <a:srgbClr val="555555"/>
                           </a:solidFill>
@@ -3171,14 +3139,14 @@
                         </a:rPr>
                         <a:t>06/29-07/05</a:t>
                       </a:r>
-                      <a:endParaRPr lang="en-US" sz="800" dirty="0">
+                      <a:endParaRPr lang="en-US" sz="900" dirty="0">
                         <a:latin typeface="Noto Sans TC" charset="0"/>
                         <a:ea typeface="Noto Sans TC" charset="0"/>
                         <a:cs typeface="Noto Sans TC" charset="0"/>
                       </a:endParaRPr>
                     </a:p>
                   </a:txBody>
-                  <a:tcPr marL="91440" marR="91440" marT="45720" marB="45720" anchor="ctr">
+                  <a:tcPr marL="98568" marR="98568" marT="49284" marB="49284" anchor="ctr">
                     <a:lnL w="6350" cap="flat" cmpd="sng" algn="ctr">
                       <a:solidFill>
                         <a:srgbClr val="D1DCF0"/>
@@ -3225,11 +3193,11 @@
                     <a:bodyPr/>
                     <a:lstStyle/>
                     <a:p>
-                      <a:pPr algn="ctr" indent="0" marL="0">
+                      <a:pPr marL="0" indent="0" algn="ctr">
                         <a:buNone/>
                       </a:pPr>
                       <a:r>
-                        <a:rPr lang="en-US" sz="1000" dirty="0">
+                        <a:rPr lang="en-US" sz="1100" dirty="0">
                           <a:solidFill>
                             <a:srgbClr val="333333"/>
                           </a:solidFill>
@@ -3239,11 +3207,8 @@
                         </a:rPr>
                         <a:t>103</a:t>
                       </a:r>
-                      <a:pPr algn="ctr" indent="0" marL="0">
-                        <a:buNone/>
-                      </a:pPr>
                       <a:r>
-                        <a:rPr lang="en-US" sz="650" dirty="0">
+                        <a:rPr lang="en-US" sz="700" dirty="0">
                           <a:solidFill>
                             <a:srgbClr val="FF5000"/>
                           </a:solidFill>
@@ -3253,14 +3218,14 @@
                         </a:rPr>
                         <a:t> ▲26</a:t>
                       </a:r>
-                      <a:endParaRPr lang="en-US" sz="1200" dirty="0">
+                      <a:endParaRPr lang="en-US" sz="1300" dirty="0">
                         <a:latin typeface="Noto Sans TC" charset="0"/>
                         <a:ea typeface="Noto Sans TC" charset="0"/>
                         <a:cs typeface="Noto Sans TC" charset="0"/>
                       </a:endParaRPr>
                     </a:p>
                   </a:txBody>
-                  <a:tcPr marL="91440" marR="91440" marT="45720" marB="45720" anchor="ctr">
+                  <a:tcPr marL="98568" marR="98568" marT="49284" marB="49284" anchor="ctr">
                     <a:lnL w="6350" cap="flat" cmpd="sng" algn="ctr">
                       <a:solidFill>
                         <a:srgbClr val="D1DCF0"/>
@@ -3307,11 +3272,11 @@
                     <a:bodyPr/>
                     <a:lstStyle/>
                     <a:p>
-                      <a:pPr algn="ctr" indent="0" marL="0">
+                      <a:pPr marL="0" indent="0" algn="ctr">
                         <a:buNone/>
                       </a:pPr>
                       <a:r>
-                        <a:rPr lang="en-US" sz="1000" dirty="0">
+                        <a:rPr lang="en-US" sz="1100" dirty="0">
                           <a:solidFill>
                             <a:srgbClr val="333333"/>
                           </a:solidFill>
@@ -3321,11 +3286,8 @@
                         </a:rPr>
                         <a:t>6</a:t>
                       </a:r>
-                      <a:pPr algn="ctr" indent="0" marL="0">
-                        <a:buNone/>
-                      </a:pPr>
                       <a:r>
-                        <a:rPr lang="en-US" sz="650" dirty="0">
+                        <a:rPr lang="en-US" sz="700" dirty="0">
                           <a:solidFill>
                             <a:srgbClr val="0076A9"/>
                           </a:solidFill>
@@ -3335,14 +3297,14 @@
                         </a:rPr>
                         <a:t> ▼7</a:t>
                       </a:r>
-                      <a:endParaRPr lang="en-US" sz="1200" dirty="0">
+                      <a:endParaRPr lang="en-US" sz="1300" dirty="0">
                         <a:latin typeface="Noto Sans TC" charset="0"/>
                         <a:ea typeface="Noto Sans TC" charset="0"/>
                         <a:cs typeface="Noto Sans TC" charset="0"/>
                       </a:endParaRPr>
                     </a:p>
                   </a:txBody>
-                  <a:tcPr marL="91440" marR="91440" marT="45720" marB="45720" anchor="ctr">
+                  <a:tcPr marL="98568" marR="98568" marT="49284" marB="49284" anchor="ctr">
                     <a:lnL w="6350" cap="flat" cmpd="sng" algn="ctr">
                       <a:solidFill>
                         <a:srgbClr val="D1DCF0"/>
@@ -3389,11 +3351,11 @@
                     <a:bodyPr/>
                     <a:lstStyle/>
                     <a:p>
-                      <a:pPr algn="ctr" indent="0" marL="0">
+                      <a:pPr marL="0" indent="0" algn="ctr">
                         <a:buNone/>
                       </a:pPr>
                       <a:r>
-                        <a:rPr lang="en-US" sz="1000" dirty="0">
+                        <a:rPr lang="en-US" sz="1100" dirty="0">
                           <a:solidFill>
                             <a:srgbClr val="333333"/>
                           </a:solidFill>
@@ -3403,11 +3365,8 @@
                         </a:rPr>
                         <a:t>9</a:t>
                       </a:r>
-                      <a:pPr algn="ctr" indent="0" marL="0">
-                        <a:buNone/>
-                      </a:pPr>
                       <a:r>
-                        <a:rPr lang="en-US" sz="650" dirty="0">
+                        <a:rPr lang="en-US" sz="700" dirty="0">
                           <a:solidFill>
                             <a:srgbClr val="FF5000"/>
                           </a:solidFill>
@@ -3417,14 +3376,14 @@
                         </a:rPr>
                         <a:t> ▲2</a:t>
                       </a:r>
-                      <a:endParaRPr lang="en-US" sz="1200" dirty="0">
+                      <a:endParaRPr lang="en-US" sz="1300" dirty="0">
                         <a:latin typeface="Noto Sans TC" charset="0"/>
                         <a:ea typeface="Noto Sans TC" charset="0"/>
                         <a:cs typeface="Noto Sans TC" charset="0"/>
                       </a:endParaRPr>
                     </a:p>
                   </a:txBody>
-                  <a:tcPr marL="91440" marR="91440" marT="45720" marB="45720" anchor="ctr">
+                  <a:tcPr marL="98568" marR="98568" marT="49284" marB="49284" anchor="ctr">
                     <a:lnL w="6350" cap="flat" cmpd="sng" algn="ctr">
                       <a:solidFill>
                         <a:srgbClr val="D1DCF0"/>
@@ -3471,11 +3430,11 @@
                     <a:bodyPr/>
                     <a:lstStyle/>
                     <a:p>
-                      <a:pPr algn="ctr" indent="0" marL="0">
+                      <a:pPr marL="0" indent="0" algn="ctr">
                         <a:buNone/>
                       </a:pPr>
                       <a:r>
-                        <a:rPr lang="en-US" sz="1000" dirty="0">
+                        <a:rPr lang="en-US" sz="1100" dirty="0">
                           <a:solidFill>
                             <a:srgbClr val="333333"/>
                           </a:solidFill>
@@ -3485,11 +3444,8 @@
                         </a:rPr>
                         <a:t>7</a:t>
                       </a:r>
-                      <a:pPr algn="ctr" indent="0" marL="0">
-                        <a:buNone/>
-                      </a:pPr>
                       <a:r>
-                        <a:rPr lang="en-US" sz="650" dirty="0">
+                        <a:rPr lang="en-US" sz="700" dirty="0">
                           <a:solidFill>
                             <a:srgbClr val="0076A9"/>
                           </a:solidFill>
@@ -3499,14 +3455,14 @@
                         </a:rPr>
                         <a:t> ▼6</a:t>
                       </a:r>
-                      <a:endParaRPr lang="en-US" sz="1200" dirty="0">
+                      <a:endParaRPr lang="en-US" sz="1300" dirty="0">
                         <a:latin typeface="Noto Sans TC" charset="0"/>
                         <a:ea typeface="Noto Sans TC" charset="0"/>
                         <a:cs typeface="Noto Sans TC" charset="0"/>
                       </a:endParaRPr>
                     </a:p>
                   </a:txBody>
-                  <a:tcPr marL="91440" marR="91440" marT="45720" marB="45720" anchor="ctr">
+                  <a:tcPr marL="98568" marR="98568" marT="49284" marB="49284" anchor="ctr">
                     <a:lnL w="6350" cap="flat" cmpd="sng" algn="ctr">
                       <a:solidFill>
                         <a:srgbClr val="D1DCF0"/>
@@ -3553,11 +3509,11 @@
                     <a:bodyPr/>
                     <a:lstStyle/>
                     <a:p>
-                      <a:pPr algn="ctr" indent="0" marL="0">
+                      <a:pPr marL="0" indent="0" algn="ctr">
                         <a:buNone/>
                       </a:pPr>
                       <a:r>
-                        <a:rPr lang="en-US" sz="1000" dirty="0">
+                        <a:rPr lang="en-US" sz="1100" dirty="0">
                           <a:solidFill>
                             <a:srgbClr val="333333"/>
                           </a:solidFill>
@@ -3567,11 +3523,8 @@
                         </a:rPr>
                         <a:t>14</a:t>
                       </a:r>
-                      <a:pPr algn="ctr" indent="0" marL="0">
-                        <a:buNone/>
-                      </a:pPr>
                       <a:r>
-                        <a:rPr lang="en-US" sz="650" dirty="0">
+                        <a:rPr lang="en-US" sz="700" dirty="0">
                           <a:solidFill>
                             <a:srgbClr val="0076A9"/>
                           </a:solidFill>
@@ -3581,14 +3534,14 @@
                         </a:rPr>
                         <a:t> ▼7</a:t>
                       </a:r>
-                      <a:endParaRPr lang="en-US" sz="1200" dirty="0">
+                      <a:endParaRPr lang="en-US" sz="1300" dirty="0">
                         <a:latin typeface="Noto Sans TC" charset="0"/>
                         <a:ea typeface="Noto Sans TC" charset="0"/>
                         <a:cs typeface="Noto Sans TC" charset="0"/>
                       </a:endParaRPr>
                     </a:p>
                   </a:txBody>
-                  <a:tcPr marL="91440" marR="91440" marT="45720" marB="45720" anchor="ctr">
+                  <a:tcPr marL="98568" marR="98568" marT="49284" marB="49284" anchor="ctr">
                     <a:lnL w="6350" cap="flat" cmpd="sng" algn="ctr">
                       <a:solidFill>
                         <a:srgbClr val="D1DCF0"/>
@@ -3635,11 +3588,11 @@
                     <a:bodyPr/>
                     <a:lstStyle/>
                     <a:p>
-                      <a:pPr algn="ctr" indent="0" marL="0">
+                      <a:pPr marL="0" indent="0" algn="ctr">
                         <a:buNone/>
                       </a:pPr>
                       <a:r>
-                        <a:rPr lang="en-US" sz="1000" dirty="0">
+                        <a:rPr lang="en-US" sz="1100" dirty="0">
                           <a:solidFill>
                             <a:srgbClr val="333333"/>
                           </a:solidFill>
@@ -3649,11 +3602,8 @@
                         </a:rPr>
                         <a:t>8</a:t>
                       </a:r>
-                      <a:pPr algn="ctr" indent="0" marL="0">
-                        <a:buNone/>
-                      </a:pPr>
                       <a:r>
-                        <a:rPr lang="en-US" sz="650" dirty="0">
+                        <a:rPr lang="en-US" sz="700" dirty="0">
                           <a:solidFill>
                             <a:srgbClr val="0076A9"/>
                           </a:solidFill>
@@ -3663,14 +3613,14 @@
                         </a:rPr>
                         <a:t> ▼24</a:t>
                       </a:r>
-                      <a:endParaRPr lang="en-US" sz="1200" dirty="0">
+                      <a:endParaRPr lang="en-US" sz="1300" dirty="0">
                         <a:latin typeface="Noto Sans TC" charset="0"/>
                         <a:ea typeface="Noto Sans TC" charset="0"/>
                         <a:cs typeface="Noto Sans TC" charset="0"/>
                       </a:endParaRPr>
                     </a:p>
                   </a:txBody>
-                  <a:tcPr marL="91440" marR="91440" marT="45720" marB="45720" anchor="ctr">
+                  <a:tcPr marL="98568" marR="98568" marT="49284" marB="49284" anchor="ctr">
                     <a:lnL w="6350" cap="flat" cmpd="sng" algn="ctr">
                       <a:solidFill>
                         <a:srgbClr val="D1DCF0"/>
@@ -3717,11 +3667,11 @@
                     <a:bodyPr/>
                     <a:lstStyle/>
                     <a:p>
-                      <a:pPr algn="ctr" indent="0" marL="0">
+                      <a:pPr marL="0" indent="0" algn="ctr">
                         <a:buNone/>
                       </a:pPr>
                       <a:r>
-                        <a:rPr lang="en-US" sz="1000" dirty="0">
+                        <a:rPr lang="en-US" sz="1100" dirty="0">
                           <a:solidFill>
                             <a:srgbClr val="333333"/>
                           </a:solidFill>
@@ -3731,11 +3681,8 @@
                         </a:rPr>
                         <a:t>24</a:t>
                       </a:r>
-                      <a:pPr algn="ctr" indent="0" marL="0">
-                        <a:buNone/>
-                      </a:pPr>
                       <a:r>
-                        <a:rPr lang="en-US" sz="650" dirty="0">
+                        <a:rPr lang="en-US" sz="700" dirty="0">
                           <a:solidFill>
                             <a:srgbClr val="FF5000"/>
                           </a:solidFill>
@@ -3745,14 +3692,14 @@
                         </a:rPr>
                         <a:t> ▲8</a:t>
                       </a:r>
-                      <a:endParaRPr lang="en-US" sz="1200" dirty="0">
+                      <a:endParaRPr lang="en-US" sz="1300" dirty="0">
                         <a:latin typeface="Noto Sans TC" charset="0"/>
                         <a:ea typeface="Noto Sans TC" charset="0"/>
                         <a:cs typeface="Noto Sans TC" charset="0"/>
                       </a:endParaRPr>
                     </a:p>
                   </a:txBody>
-                  <a:tcPr marL="91440" marR="91440" marT="45720" marB="45720" anchor="ctr">
+                  <a:tcPr marL="98568" marR="98568" marT="49284" marB="49284" anchor="ctr">
                     <a:lnL w="6350" cap="flat" cmpd="sng" algn="ctr">
                       <a:solidFill>
                         <a:srgbClr val="D1DCF0"/>
@@ -3799,11 +3746,11 @@
                     <a:bodyPr/>
                     <a:lstStyle/>
                     <a:p>
-                      <a:pPr algn="ctr" indent="0" marL="0">
+                      <a:pPr marL="0" indent="0" algn="ctr">
                         <a:buNone/>
                       </a:pPr>
                       <a:r>
-                        <a:rPr lang="en-US" sz="1100" b="1" dirty="0">
+                        <a:rPr lang="en-US" sz="1200" b="1" dirty="0">
                           <a:solidFill>
                             <a:srgbClr val="FF5000"/>
                           </a:solidFill>
@@ -3813,11 +3760,8 @@
                         </a:rPr>
                         <a:t>152</a:t>
                       </a:r>
-                      <a:pPr algn="ctr" indent="0" marL="0">
-                        <a:buNone/>
-                      </a:pPr>
                       <a:r>
-                        <a:rPr lang="en-US" sz="650" dirty="0">
+                        <a:rPr lang="en-US" sz="700" dirty="0">
                           <a:solidFill>
                             <a:srgbClr val="0076A9"/>
                           </a:solidFill>
@@ -3827,14 +3771,14 @@
                         </a:rPr>
                         <a:t> ▼6</a:t>
                       </a:r>
-                      <a:endParaRPr lang="en-US" sz="1200" dirty="0">
+                      <a:endParaRPr lang="en-US" sz="1300" dirty="0">
                         <a:latin typeface="Noto Sans TC" charset="0"/>
                         <a:ea typeface="Noto Sans TC" charset="0"/>
                         <a:cs typeface="Noto Sans TC" charset="0"/>
                       </a:endParaRPr>
                     </a:p>
                   </a:txBody>
-                  <a:tcPr marL="91440" marR="91440" marT="45720" marB="45720" anchor="ctr">
+                  <a:tcPr marL="98568" marR="98568" marT="49284" marB="49284" anchor="ctr">
                     <a:lnL w="6350" cap="flat" cmpd="sng" algn="ctr">
                       <a:solidFill>
                         <a:srgbClr val="D1DCF0"/>
@@ -3876,18 +3820,23 @@
                     </a:solidFill>
                   </a:tcPr>
                 </a:tc>
+                <a:extLst>
+                  <a:ext uri="{0D108BD9-81ED-4DB2-BD59-A6C34878D82A}">
+                    <a16:rowId xmlns:a16="http://schemas.microsoft.com/office/drawing/2014/main" val="10002"/>
+                  </a:ext>
+                </a:extLst>
               </a:tr>
-              <a:tr h="338328">
+              <a:tr h="364701">
                 <a:tc>
                   <a:txBody>
                     <a:bodyPr/>
                     <a:lstStyle/>
                     <a:p>
-                      <a:pPr algn="ctr" indent="0" marL="0">
+                      <a:pPr marL="0" indent="0" algn="ctr">
                         <a:buNone/>
                       </a:pPr>
                       <a:r>
-                        <a:rPr lang="en-US" sz="800" dirty="0">
+                        <a:rPr lang="en-US" sz="900" dirty="0">
                           <a:solidFill>
                             <a:srgbClr val="555555"/>
                           </a:solidFill>
@@ -3897,18 +3846,18 @@
                         </a:rPr>
                         <a:t>28週</a:t>
                       </a:r>
-                      <a:endParaRPr lang="en-US" sz="800" dirty="0">
+                      <a:endParaRPr lang="en-US" sz="900" dirty="0">
                         <a:latin typeface="Noto Sans TC" charset="0"/>
                         <a:ea typeface="Noto Sans TC" charset="0"/>
                         <a:cs typeface="Noto Sans TC" charset="0"/>
                       </a:endParaRPr>
                     </a:p>
                     <a:p>
-                      <a:pPr algn="ctr" indent="0" marL="0">
+                      <a:pPr marL="0" indent="0" algn="ctr">
                         <a:buNone/>
                       </a:pPr>
                       <a:r>
-                        <a:rPr lang="en-US" sz="800" dirty="0">
+                        <a:rPr lang="en-US" sz="900" dirty="0">
                           <a:solidFill>
                             <a:srgbClr val="555555"/>
                           </a:solidFill>
@@ -3918,14 +3867,14 @@
                         </a:rPr>
                         <a:t>07/06-07/12</a:t>
                       </a:r>
-                      <a:endParaRPr lang="en-US" sz="800" dirty="0">
+                      <a:endParaRPr lang="en-US" sz="900" dirty="0">
                         <a:latin typeface="Noto Sans TC" charset="0"/>
                         <a:ea typeface="Noto Sans TC" charset="0"/>
                         <a:cs typeface="Noto Sans TC" charset="0"/>
                       </a:endParaRPr>
                     </a:p>
                   </a:txBody>
-                  <a:tcPr marL="91440" marR="91440" marT="45720" marB="45720" anchor="ctr">
+                  <a:tcPr marL="98568" marR="98568" marT="49284" marB="49284" anchor="ctr">
                     <a:lnL w="6350" cap="flat" cmpd="sng" algn="ctr">
                       <a:solidFill>
                         <a:srgbClr val="D1DCF0"/>
@@ -3972,11 +3921,11 @@
                     <a:bodyPr/>
                     <a:lstStyle/>
                     <a:p>
-                      <a:pPr algn="ctr" indent="0" marL="0">
+                      <a:pPr marL="0" indent="0" algn="ctr">
                         <a:buNone/>
                       </a:pPr>
                       <a:r>
-                        <a:rPr lang="en-US" sz="1000" dirty="0">
+                        <a:rPr lang="en-US" sz="1100" dirty="0">
                           <a:solidFill>
                             <a:srgbClr val="333333"/>
                           </a:solidFill>
@@ -3986,11 +3935,8 @@
                         </a:rPr>
                         <a:t>112</a:t>
                       </a:r>
-                      <a:pPr algn="ctr" indent="0" marL="0">
-                        <a:buNone/>
-                      </a:pPr>
                       <a:r>
-                        <a:rPr lang="en-US" sz="650" dirty="0">
+                        <a:rPr lang="en-US" sz="700" dirty="0">
                           <a:solidFill>
                             <a:srgbClr val="FF5000"/>
                           </a:solidFill>
@@ -4000,14 +3946,14 @@
                         </a:rPr>
                         <a:t> ▲9</a:t>
                       </a:r>
-                      <a:endParaRPr lang="en-US" sz="1200" dirty="0">
+                      <a:endParaRPr lang="en-US" sz="1300" dirty="0">
                         <a:latin typeface="Noto Sans TC" charset="0"/>
                         <a:ea typeface="Noto Sans TC" charset="0"/>
                         <a:cs typeface="Noto Sans TC" charset="0"/>
                       </a:endParaRPr>
                     </a:p>
                   </a:txBody>
-                  <a:tcPr marL="91440" marR="91440" marT="45720" marB="45720" anchor="ctr">
+                  <a:tcPr marL="98568" marR="98568" marT="49284" marB="49284" anchor="ctr">
                     <a:lnL w="6350" cap="flat" cmpd="sng" algn="ctr">
                       <a:solidFill>
                         <a:srgbClr val="D1DCF0"/>
@@ -4054,11 +4000,11 @@
                     <a:bodyPr/>
                     <a:lstStyle/>
                     <a:p>
-                      <a:pPr algn="ctr" indent="0" marL="0">
+                      <a:pPr marL="0" indent="0" algn="ctr">
                         <a:buNone/>
                       </a:pPr>
                       <a:r>
-                        <a:rPr lang="en-US" sz="1000" dirty="0">
+                        <a:rPr lang="en-US" sz="1100" dirty="0">
                           <a:solidFill>
                             <a:srgbClr val="333333"/>
                           </a:solidFill>
@@ -4068,11 +4014,8 @@
                         </a:rPr>
                         <a:t>7</a:t>
                       </a:r>
-                      <a:pPr algn="ctr" indent="0" marL="0">
-                        <a:buNone/>
-                      </a:pPr>
                       <a:r>
-                        <a:rPr lang="en-US" sz="650" dirty="0">
+                        <a:rPr lang="en-US" sz="700" dirty="0">
                           <a:solidFill>
                             <a:srgbClr val="FF5000"/>
                           </a:solidFill>
@@ -4082,14 +4025,14 @@
                         </a:rPr>
                         <a:t> ▲1</a:t>
                       </a:r>
-                      <a:endParaRPr lang="en-US" sz="1200" dirty="0">
+                      <a:endParaRPr lang="en-US" sz="1300" dirty="0">
                         <a:latin typeface="Noto Sans TC" charset="0"/>
                         <a:ea typeface="Noto Sans TC" charset="0"/>
                         <a:cs typeface="Noto Sans TC" charset="0"/>
                       </a:endParaRPr>
                     </a:p>
                   </a:txBody>
-                  <a:tcPr marL="91440" marR="91440" marT="45720" marB="45720" anchor="ctr">
+                  <a:tcPr marL="98568" marR="98568" marT="49284" marB="49284" anchor="ctr">
                     <a:lnL w="6350" cap="flat" cmpd="sng" algn="ctr">
                       <a:solidFill>
                         <a:srgbClr val="D1DCF0"/>
@@ -4136,11 +4079,11 @@
                     <a:bodyPr/>
                     <a:lstStyle/>
                     <a:p>
-                      <a:pPr algn="ctr" indent="0" marL="0">
+                      <a:pPr marL="0" indent="0" algn="ctr">
                         <a:buNone/>
                       </a:pPr>
                       <a:r>
-                        <a:rPr lang="en-US" sz="1000" dirty="0">
+                        <a:rPr lang="en-US" sz="1100" dirty="0">
                           <a:solidFill>
                             <a:srgbClr val="333333"/>
                           </a:solidFill>
@@ -4150,11 +4093,8 @@
                         </a:rPr>
                         <a:t>2</a:t>
                       </a:r>
-                      <a:pPr algn="ctr" indent="0" marL="0">
-                        <a:buNone/>
-                      </a:pPr>
                       <a:r>
-                        <a:rPr lang="en-US" sz="650" dirty="0">
+                        <a:rPr lang="en-US" sz="700" dirty="0">
                           <a:solidFill>
                             <a:srgbClr val="0076A9"/>
                           </a:solidFill>
@@ -4164,14 +4104,14 @@
                         </a:rPr>
                         <a:t> ▼7</a:t>
                       </a:r>
-                      <a:endParaRPr lang="en-US" sz="1200" dirty="0">
+                      <a:endParaRPr lang="en-US" sz="1300" dirty="0">
                         <a:latin typeface="Noto Sans TC" charset="0"/>
                         <a:ea typeface="Noto Sans TC" charset="0"/>
                         <a:cs typeface="Noto Sans TC" charset="0"/>
                       </a:endParaRPr>
                     </a:p>
                   </a:txBody>
-                  <a:tcPr marL="91440" marR="91440" marT="45720" marB="45720" anchor="ctr">
+                  <a:tcPr marL="98568" marR="98568" marT="49284" marB="49284" anchor="ctr">
                     <a:lnL w="6350" cap="flat" cmpd="sng" algn="ctr">
                       <a:solidFill>
                         <a:srgbClr val="D1DCF0"/>
@@ -4218,11 +4158,11 @@
                     <a:bodyPr/>
                     <a:lstStyle/>
                     <a:p>
-                      <a:pPr algn="ctr" indent="0" marL="0">
+                      <a:pPr marL="0" indent="0" algn="ctr">
                         <a:buNone/>
                       </a:pPr>
                       <a:r>
-                        <a:rPr lang="en-US" sz="1000" dirty="0">
+                        <a:rPr lang="en-US" sz="1100" dirty="0">
                           <a:solidFill>
                             <a:srgbClr val="333333"/>
                           </a:solidFill>
@@ -4232,11 +4172,8 @@
                         </a:rPr>
                         <a:t>14</a:t>
                       </a:r>
-                      <a:pPr algn="ctr" indent="0" marL="0">
-                        <a:buNone/>
-                      </a:pPr>
                       <a:r>
-                        <a:rPr lang="en-US" sz="650" dirty="0">
+                        <a:rPr lang="en-US" sz="700" dirty="0">
                           <a:solidFill>
                             <a:srgbClr val="FF5000"/>
                           </a:solidFill>
@@ -4246,14 +4183,14 @@
                         </a:rPr>
                         <a:t> ▲7</a:t>
                       </a:r>
-                      <a:endParaRPr lang="en-US" sz="1200" dirty="0">
+                      <a:endParaRPr lang="en-US" sz="1300" dirty="0">
                         <a:latin typeface="Noto Sans TC" charset="0"/>
                         <a:ea typeface="Noto Sans TC" charset="0"/>
                         <a:cs typeface="Noto Sans TC" charset="0"/>
                       </a:endParaRPr>
                     </a:p>
                   </a:txBody>
-                  <a:tcPr marL="91440" marR="91440" marT="45720" marB="45720" anchor="ctr">
+                  <a:tcPr marL="98568" marR="98568" marT="49284" marB="49284" anchor="ctr">
                     <a:lnL w="6350" cap="flat" cmpd="sng" algn="ctr">
                       <a:solidFill>
                         <a:srgbClr val="D1DCF0"/>
@@ -4300,11 +4237,11 @@
                     <a:bodyPr/>
                     <a:lstStyle/>
                     <a:p>
-                      <a:pPr algn="ctr" indent="0" marL="0">
+                      <a:pPr marL="0" indent="0" algn="ctr">
                         <a:buNone/>
                       </a:pPr>
                       <a:r>
-                        <a:rPr lang="en-US" sz="1000" dirty="0">
+                        <a:rPr lang="en-US" sz="1100" dirty="0">
                           <a:solidFill>
                             <a:srgbClr val="333333"/>
                           </a:solidFill>
@@ -4314,11 +4251,8 @@
                         </a:rPr>
                         <a:t>10</a:t>
                       </a:r>
-                      <a:pPr algn="ctr" indent="0" marL="0">
-                        <a:buNone/>
-                      </a:pPr>
                       <a:r>
-                        <a:rPr lang="en-US" sz="650" dirty="0">
+                        <a:rPr lang="en-US" sz="700" dirty="0">
                           <a:solidFill>
                             <a:srgbClr val="0076A9"/>
                           </a:solidFill>
@@ -4328,14 +4262,14 @@
                         </a:rPr>
                         <a:t> ▼4</a:t>
                       </a:r>
-                      <a:endParaRPr lang="en-US" sz="1200" dirty="0">
+                      <a:endParaRPr lang="en-US" sz="1300" dirty="0">
                         <a:latin typeface="Noto Sans TC" charset="0"/>
                         <a:ea typeface="Noto Sans TC" charset="0"/>
                         <a:cs typeface="Noto Sans TC" charset="0"/>
                       </a:endParaRPr>
                     </a:p>
                   </a:txBody>
-                  <a:tcPr marL="91440" marR="91440" marT="45720" marB="45720" anchor="ctr">
+                  <a:tcPr marL="98568" marR="98568" marT="49284" marB="49284" anchor="ctr">
                     <a:lnL w="6350" cap="flat" cmpd="sng" algn="ctr">
                       <a:solidFill>
                         <a:srgbClr val="D1DCF0"/>
@@ -4382,11 +4316,11 @@
                     <a:bodyPr/>
                     <a:lstStyle/>
                     <a:p>
-                      <a:pPr algn="ctr" indent="0" marL="0">
+                      <a:pPr marL="0" indent="0" algn="ctr">
                         <a:buNone/>
                       </a:pPr>
                       <a:r>
-                        <a:rPr lang="en-US" sz="1000" dirty="0">
+                        <a:rPr lang="en-US" sz="1100" dirty="0">
                           <a:solidFill>
                             <a:srgbClr val="333333"/>
                           </a:solidFill>
@@ -4396,14 +4330,14 @@
                         </a:rPr>
                         <a:t>8</a:t>
                       </a:r>
-                      <a:endParaRPr lang="en-US" sz="1200" dirty="0">
+                      <a:endParaRPr lang="en-US" sz="1300" dirty="0">
                         <a:latin typeface="Noto Sans TC" charset="0"/>
                         <a:ea typeface="Noto Sans TC" charset="0"/>
                         <a:cs typeface="Noto Sans TC" charset="0"/>
                       </a:endParaRPr>
                     </a:p>
                   </a:txBody>
-                  <a:tcPr marL="91440" marR="91440" marT="45720" marB="45720" anchor="ctr">
+                  <a:tcPr marL="98568" marR="98568" marT="49284" marB="49284" anchor="ctr">
                     <a:lnL w="6350" cap="flat" cmpd="sng" algn="ctr">
                       <a:solidFill>
                         <a:srgbClr val="D1DCF0"/>
@@ -4450,11 +4384,11 @@
                     <a:bodyPr/>
                     <a:lstStyle/>
                     <a:p>
-                      <a:pPr algn="ctr" indent="0" marL="0">
+                      <a:pPr marL="0" indent="0" algn="ctr">
                         <a:buNone/>
                       </a:pPr>
                       <a:r>
-                        <a:rPr lang="en-US" sz="1000" dirty="0">
+                        <a:rPr lang="en-US" sz="1100" dirty="0">
                           <a:solidFill>
                             <a:srgbClr val="333333"/>
                           </a:solidFill>
@@ -4464,11 +4398,8 @@
                         </a:rPr>
                         <a:t>12</a:t>
                       </a:r>
-                      <a:pPr algn="ctr" indent="0" marL="0">
-                        <a:buNone/>
-                      </a:pPr>
                       <a:r>
-                        <a:rPr lang="en-US" sz="650" dirty="0">
+                        <a:rPr lang="en-US" sz="700" dirty="0">
                           <a:solidFill>
                             <a:srgbClr val="0076A9"/>
                           </a:solidFill>
@@ -4478,14 +4409,14 @@
                         </a:rPr>
                         <a:t> ▼12</a:t>
                       </a:r>
-                      <a:endParaRPr lang="en-US" sz="1200" dirty="0">
+                      <a:endParaRPr lang="en-US" sz="1300" dirty="0">
                         <a:latin typeface="Noto Sans TC" charset="0"/>
                         <a:ea typeface="Noto Sans TC" charset="0"/>
                         <a:cs typeface="Noto Sans TC" charset="0"/>
                       </a:endParaRPr>
                     </a:p>
                   </a:txBody>
-                  <a:tcPr marL="91440" marR="91440" marT="45720" marB="45720" anchor="ctr">
+                  <a:tcPr marL="98568" marR="98568" marT="49284" marB="49284" anchor="ctr">
                     <a:lnL w="6350" cap="flat" cmpd="sng" algn="ctr">
                       <a:solidFill>
                         <a:srgbClr val="D1DCF0"/>
@@ -4532,11 +4463,11 @@
                     <a:bodyPr/>
                     <a:lstStyle/>
                     <a:p>
-                      <a:pPr algn="ctr" indent="0" marL="0">
+                      <a:pPr marL="0" indent="0" algn="ctr">
                         <a:buNone/>
                       </a:pPr>
                       <a:r>
-                        <a:rPr lang="en-US" sz="1100" b="1" dirty="0">
+                        <a:rPr lang="en-US" sz="1200" b="1" dirty="0">
                           <a:solidFill>
                             <a:srgbClr val="FF5000"/>
                           </a:solidFill>
@@ -4546,11 +4477,8 @@
                         </a:rPr>
                         <a:t>138</a:t>
                       </a:r>
-                      <a:pPr algn="ctr" indent="0" marL="0">
-                        <a:buNone/>
-                      </a:pPr>
                       <a:r>
-                        <a:rPr lang="en-US" sz="650" dirty="0">
+                        <a:rPr lang="en-US" sz="700" dirty="0">
                           <a:solidFill>
                             <a:srgbClr val="0076A9"/>
                           </a:solidFill>
@@ -4560,14 +4488,14 @@
                         </a:rPr>
                         <a:t> ▼14</a:t>
                       </a:r>
-                      <a:endParaRPr lang="en-US" sz="1200" dirty="0">
+                      <a:endParaRPr lang="en-US" sz="1300" dirty="0">
                         <a:latin typeface="Noto Sans TC" charset="0"/>
                         <a:ea typeface="Noto Sans TC" charset="0"/>
                         <a:cs typeface="Noto Sans TC" charset="0"/>
                       </a:endParaRPr>
                     </a:p>
                   </a:txBody>
-                  <a:tcPr marL="91440" marR="91440" marT="45720" marB="45720" anchor="ctr">
+                  <a:tcPr marL="98568" marR="98568" marT="49284" marB="49284" anchor="ctr">
                     <a:lnL w="6350" cap="flat" cmpd="sng" algn="ctr">
                       <a:solidFill>
                         <a:srgbClr val="D1DCF0"/>
@@ -4609,18 +4537,23 @@
                     </a:solidFill>
                   </a:tcPr>
                 </a:tc>
+                <a:extLst>
+                  <a:ext uri="{0D108BD9-81ED-4DB2-BD59-A6C34878D82A}">
+                    <a16:rowId xmlns:a16="http://schemas.microsoft.com/office/drawing/2014/main" val="10003"/>
+                  </a:ext>
+                </a:extLst>
               </a:tr>
-              <a:tr h="338328">
+              <a:tr h="364701">
                 <a:tc>
                   <a:txBody>
                     <a:bodyPr/>
                     <a:lstStyle/>
                     <a:p>
-                      <a:pPr algn="ctr" indent="0" marL="0">
+                      <a:pPr marL="0" indent="0" algn="ctr">
                         <a:buNone/>
                       </a:pPr>
                       <a:r>
-                        <a:rPr lang="en-US" sz="800" b="1" dirty="0">
+                        <a:rPr lang="en-US" sz="900" b="1" dirty="0">
                           <a:solidFill>
                             <a:srgbClr val="333333"/>
                           </a:solidFill>
@@ -4630,18 +4563,18 @@
                         </a:rPr>
                         <a:t>29週</a:t>
                       </a:r>
-                      <a:endParaRPr lang="en-US" sz="800" dirty="0">
+                      <a:endParaRPr lang="en-US" sz="900" dirty="0">
                         <a:latin typeface="Noto Sans TC" charset="0"/>
                         <a:ea typeface="Noto Sans TC" charset="0"/>
                         <a:cs typeface="Noto Sans TC" charset="0"/>
                       </a:endParaRPr>
                     </a:p>
                     <a:p>
-                      <a:pPr algn="ctr" indent="0" marL="0">
+                      <a:pPr marL="0" indent="0" algn="ctr">
                         <a:buNone/>
                       </a:pPr>
                       <a:r>
-                        <a:rPr lang="en-US" sz="800" b="1" dirty="0">
+                        <a:rPr lang="en-US" sz="900" b="1" dirty="0">
                           <a:solidFill>
                             <a:srgbClr val="333333"/>
                           </a:solidFill>
@@ -4651,14 +4584,14 @@
                         </a:rPr>
                         <a:t>07/13-07/19</a:t>
                       </a:r>
-                      <a:endParaRPr lang="en-US" sz="800" dirty="0">
+                      <a:endParaRPr lang="en-US" sz="900" dirty="0">
                         <a:latin typeface="Noto Sans TC" charset="0"/>
                         <a:ea typeface="Noto Sans TC" charset="0"/>
                         <a:cs typeface="Noto Sans TC" charset="0"/>
                       </a:endParaRPr>
                     </a:p>
                   </a:txBody>
-                  <a:tcPr marL="91440" marR="91440" marT="45720" marB="45720" anchor="ctr">
+                  <a:tcPr marL="98568" marR="98568" marT="49284" marB="49284" anchor="ctr">
                     <a:lnL w="6350" cap="flat" cmpd="sng" algn="ctr">
                       <a:solidFill>
                         <a:srgbClr val="D1DCF0"/>
@@ -4705,11 +4638,11 @@
                     <a:bodyPr/>
                     <a:lstStyle/>
                     <a:p>
-                      <a:pPr algn="ctr" indent="0" marL="0">
+                      <a:pPr marL="0" indent="0" algn="ctr">
                         <a:buNone/>
                       </a:pPr>
                       <a:r>
-                        <a:rPr lang="en-US" sz="1000" b="1" dirty="0">
+                        <a:rPr lang="en-US" sz="1100" b="1" dirty="0">
                           <a:solidFill>
                             <a:srgbClr val="333333"/>
                           </a:solidFill>
@@ -4719,11 +4652,8 @@
                         </a:rPr>
                         <a:t>97</a:t>
                       </a:r>
-                      <a:pPr algn="ctr" indent="0" marL="0">
-                        <a:buNone/>
-                      </a:pPr>
                       <a:r>
-                        <a:rPr lang="en-US" sz="650" dirty="0">
+                        <a:rPr lang="en-US" sz="700" dirty="0">
                           <a:solidFill>
                             <a:srgbClr val="0076A9"/>
                           </a:solidFill>
@@ -4733,14 +4663,14 @@
                         </a:rPr>
                         <a:t> ▼15</a:t>
                       </a:r>
-                      <a:endParaRPr lang="en-US" sz="1200" dirty="0">
+                      <a:endParaRPr lang="en-US" sz="1300" dirty="0">
                         <a:latin typeface="Noto Sans TC" charset="0"/>
                         <a:ea typeface="Noto Sans TC" charset="0"/>
                         <a:cs typeface="Noto Sans TC" charset="0"/>
                       </a:endParaRPr>
                     </a:p>
                   </a:txBody>
-                  <a:tcPr marL="91440" marR="91440" marT="45720" marB="45720" anchor="ctr">
+                  <a:tcPr marL="98568" marR="98568" marT="49284" marB="49284" anchor="ctr">
                     <a:lnL w="6350" cap="flat" cmpd="sng" algn="ctr">
                       <a:solidFill>
                         <a:srgbClr val="D1DCF0"/>
@@ -4787,11 +4717,11 @@
                     <a:bodyPr/>
                     <a:lstStyle/>
                     <a:p>
-                      <a:pPr algn="ctr" indent="0" marL="0">
+                      <a:pPr marL="0" indent="0" algn="ctr">
                         <a:buNone/>
                       </a:pPr>
                       <a:r>
-                        <a:rPr lang="en-US" sz="1000" b="1" dirty="0">
+                        <a:rPr lang="en-US" sz="1100" b="1" dirty="0">
                           <a:solidFill>
                             <a:srgbClr val="333333"/>
                           </a:solidFill>
@@ -4801,11 +4731,8 @@
                         </a:rPr>
                         <a:t>5</a:t>
                       </a:r>
-                      <a:pPr algn="ctr" indent="0" marL="0">
-                        <a:buNone/>
-                      </a:pPr>
                       <a:r>
-                        <a:rPr lang="en-US" sz="650" dirty="0">
+                        <a:rPr lang="en-US" sz="700" dirty="0">
                           <a:solidFill>
                             <a:srgbClr val="0076A9"/>
                           </a:solidFill>
@@ -4815,14 +4742,14 @@
                         </a:rPr>
                         <a:t> ▼2</a:t>
                       </a:r>
-                      <a:endParaRPr lang="en-US" sz="1200" dirty="0">
+                      <a:endParaRPr lang="en-US" sz="1300" dirty="0">
                         <a:latin typeface="Noto Sans TC" charset="0"/>
                         <a:ea typeface="Noto Sans TC" charset="0"/>
                         <a:cs typeface="Noto Sans TC" charset="0"/>
                       </a:endParaRPr>
                     </a:p>
                   </a:txBody>
-                  <a:tcPr marL="91440" marR="91440" marT="45720" marB="45720" anchor="ctr">
+                  <a:tcPr marL="98568" marR="98568" marT="49284" marB="49284" anchor="ctr">
                     <a:lnL w="6350" cap="flat" cmpd="sng" algn="ctr">
                       <a:solidFill>
                         <a:srgbClr val="D1DCF0"/>
@@ -4869,11 +4796,11 @@
                     <a:bodyPr/>
                     <a:lstStyle/>
                     <a:p>
-                      <a:pPr algn="ctr" indent="0" marL="0">
+                      <a:pPr marL="0" indent="0" algn="ctr">
                         <a:buNone/>
                       </a:pPr>
                       <a:r>
-                        <a:rPr lang="en-US" sz="1000" b="1" dirty="0">
+                        <a:rPr lang="en-US" sz="1100" b="1" dirty="0">
                           <a:solidFill>
                             <a:srgbClr val="333333"/>
                           </a:solidFill>
@@ -4883,11 +4810,8 @@
                         </a:rPr>
                         <a:t>7</a:t>
                       </a:r>
-                      <a:pPr algn="ctr" indent="0" marL="0">
-                        <a:buNone/>
-                      </a:pPr>
                       <a:r>
-                        <a:rPr lang="en-US" sz="650" dirty="0">
+                        <a:rPr lang="en-US" sz="700" dirty="0">
                           <a:solidFill>
                             <a:srgbClr val="FF5000"/>
                           </a:solidFill>
@@ -4897,14 +4821,14 @@
                         </a:rPr>
                         <a:t> ▲5</a:t>
                       </a:r>
-                      <a:endParaRPr lang="en-US" sz="1200" dirty="0">
+                      <a:endParaRPr lang="en-US" sz="1300" dirty="0">
                         <a:latin typeface="Noto Sans TC" charset="0"/>
                         <a:ea typeface="Noto Sans TC" charset="0"/>
                         <a:cs typeface="Noto Sans TC" charset="0"/>
                       </a:endParaRPr>
                     </a:p>
                   </a:txBody>
-                  <a:tcPr marL="91440" marR="91440" marT="45720" marB="45720" anchor="ctr">
+                  <a:tcPr marL="98568" marR="98568" marT="49284" marB="49284" anchor="ctr">
                     <a:lnL w="6350" cap="flat" cmpd="sng" algn="ctr">
                       <a:solidFill>
                         <a:srgbClr val="D1DCF0"/>
@@ -4951,11 +4875,11 @@
                     <a:bodyPr/>
                     <a:lstStyle/>
                     <a:p>
-                      <a:pPr algn="ctr" indent="0" marL="0">
+                      <a:pPr marL="0" indent="0" algn="ctr">
                         <a:buNone/>
                       </a:pPr>
                       <a:r>
-                        <a:rPr lang="en-US" sz="1000" b="1" dirty="0">
+                        <a:rPr lang="en-US" sz="1100" b="1" dirty="0">
                           <a:solidFill>
                             <a:srgbClr val="333333"/>
                           </a:solidFill>
@@ -4965,11 +4889,8 @@
                         </a:rPr>
                         <a:t>11</a:t>
                       </a:r>
-                      <a:pPr algn="ctr" indent="0" marL="0">
-                        <a:buNone/>
-                      </a:pPr>
                       <a:r>
-                        <a:rPr lang="en-US" sz="650" dirty="0">
+                        <a:rPr lang="en-US" sz="700" dirty="0">
                           <a:solidFill>
                             <a:srgbClr val="0076A9"/>
                           </a:solidFill>
@@ -4979,14 +4900,14 @@
                         </a:rPr>
                         <a:t> ▼3</a:t>
                       </a:r>
-                      <a:endParaRPr lang="en-US" sz="1200" dirty="0">
+                      <a:endParaRPr lang="en-US" sz="1300" dirty="0">
                         <a:latin typeface="Noto Sans TC" charset="0"/>
                         <a:ea typeface="Noto Sans TC" charset="0"/>
                         <a:cs typeface="Noto Sans TC" charset="0"/>
                       </a:endParaRPr>
                     </a:p>
                   </a:txBody>
-                  <a:tcPr marL="91440" marR="91440" marT="45720" marB="45720" anchor="ctr">
+                  <a:tcPr marL="98568" marR="98568" marT="49284" marB="49284" anchor="ctr">
                     <a:lnL w="6350" cap="flat" cmpd="sng" algn="ctr">
                       <a:solidFill>
                         <a:srgbClr val="D1DCF0"/>
@@ -5033,11 +4954,11 @@
                     <a:bodyPr/>
                     <a:lstStyle/>
                     <a:p>
-                      <a:pPr algn="ctr" indent="0" marL="0">
+                      <a:pPr marL="0" indent="0" algn="ctr">
                         <a:buNone/>
                       </a:pPr>
                       <a:r>
-                        <a:rPr lang="en-US" sz="1000" b="1" dirty="0">
+                        <a:rPr lang="en-US" sz="1100" b="1" dirty="0">
                           <a:solidFill>
                             <a:srgbClr val="333333"/>
                           </a:solidFill>
@@ -5047,11 +4968,8 @@
                         </a:rPr>
                         <a:t>15</a:t>
                       </a:r>
-                      <a:pPr algn="ctr" indent="0" marL="0">
-                        <a:buNone/>
-                      </a:pPr>
                       <a:r>
-                        <a:rPr lang="en-US" sz="650" dirty="0">
+                        <a:rPr lang="en-US" sz="700" dirty="0">
                           <a:solidFill>
                             <a:srgbClr val="FF5000"/>
                           </a:solidFill>
@@ -5061,14 +4979,14 @@
                         </a:rPr>
                         <a:t> ▲5</a:t>
                       </a:r>
-                      <a:endParaRPr lang="en-US" sz="1200" dirty="0">
+                      <a:endParaRPr lang="en-US" sz="1300" dirty="0">
                         <a:latin typeface="Noto Sans TC" charset="0"/>
                         <a:ea typeface="Noto Sans TC" charset="0"/>
                         <a:cs typeface="Noto Sans TC" charset="0"/>
                       </a:endParaRPr>
                     </a:p>
                   </a:txBody>
-                  <a:tcPr marL="91440" marR="91440" marT="45720" marB="45720" anchor="ctr">
+                  <a:tcPr marL="98568" marR="98568" marT="49284" marB="49284" anchor="ctr">
                     <a:lnL w="6350" cap="flat" cmpd="sng" algn="ctr">
                       <a:solidFill>
                         <a:srgbClr val="D1DCF0"/>
@@ -5115,11 +5033,11 @@
                     <a:bodyPr/>
                     <a:lstStyle/>
                     <a:p>
-                      <a:pPr algn="ctr" indent="0" marL="0">
+                      <a:pPr marL="0" indent="0" algn="ctr">
                         <a:buNone/>
                       </a:pPr>
                       <a:r>
-                        <a:rPr lang="en-US" sz="1000" b="1" dirty="0">
+                        <a:rPr lang="en-US" sz="1100" b="1" dirty="0">
                           <a:solidFill>
                             <a:srgbClr val="333333"/>
                           </a:solidFill>
@@ -5129,11 +5047,8 @@
                         </a:rPr>
                         <a:t>1</a:t>
                       </a:r>
-                      <a:pPr algn="ctr" indent="0" marL="0">
-                        <a:buNone/>
-                      </a:pPr>
                       <a:r>
-                        <a:rPr lang="en-US" sz="650" dirty="0">
+                        <a:rPr lang="en-US" sz="700" dirty="0">
                           <a:solidFill>
                             <a:srgbClr val="0076A9"/>
                           </a:solidFill>
@@ -5143,14 +5058,14 @@
                         </a:rPr>
                         <a:t> ▼7</a:t>
                       </a:r>
-                      <a:endParaRPr lang="en-US" sz="1200" dirty="0">
+                      <a:endParaRPr lang="en-US" sz="1300" dirty="0">
                         <a:latin typeface="Noto Sans TC" charset="0"/>
                         <a:ea typeface="Noto Sans TC" charset="0"/>
                         <a:cs typeface="Noto Sans TC" charset="0"/>
                       </a:endParaRPr>
                     </a:p>
                   </a:txBody>
-                  <a:tcPr marL="91440" marR="91440" marT="45720" marB="45720" anchor="ctr">
+                  <a:tcPr marL="98568" marR="98568" marT="49284" marB="49284" anchor="ctr">
                     <a:lnL w="6350" cap="flat" cmpd="sng" algn="ctr">
                       <a:solidFill>
                         <a:srgbClr val="D1DCF0"/>
@@ -5197,11 +5112,11 @@
                     <a:bodyPr/>
                     <a:lstStyle/>
                     <a:p>
-                      <a:pPr algn="ctr" indent="0" marL="0">
+                      <a:pPr marL="0" indent="0" algn="ctr">
                         <a:buNone/>
                       </a:pPr>
                       <a:r>
-                        <a:rPr lang="en-US" sz="1000" b="1" dirty="0">
+                        <a:rPr lang="en-US" sz="1100" b="1" dirty="0">
                           <a:solidFill>
                             <a:srgbClr val="333333"/>
                           </a:solidFill>
@@ -5211,11 +5126,8 @@
                         </a:rPr>
                         <a:t>18</a:t>
                       </a:r>
-                      <a:pPr algn="ctr" indent="0" marL="0">
-                        <a:buNone/>
-                      </a:pPr>
                       <a:r>
-                        <a:rPr lang="en-US" sz="650" dirty="0">
+                        <a:rPr lang="en-US" sz="700" dirty="0">
                           <a:solidFill>
                             <a:srgbClr val="FF5000"/>
                           </a:solidFill>
@@ -5225,14 +5137,14 @@
                         </a:rPr>
                         <a:t> ▲6</a:t>
                       </a:r>
-                      <a:endParaRPr lang="en-US" sz="1200" dirty="0">
+                      <a:endParaRPr lang="en-US" sz="1300" dirty="0">
                         <a:latin typeface="Noto Sans TC" charset="0"/>
                         <a:ea typeface="Noto Sans TC" charset="0"/>
                         <a:cs typeface="Noto Sans TC" charset="0"/>
                       </a:endParaRPr>
                     </a:p>
                   </a:txBody>
-                  <a:tcPr marL="91440" marR="91440" marT="45720" marB="45720" anchor="ctr">
+                  <a:tcPr marL="98568" marR="98568" marT="49284" marB="49284" anchor="ctr">
                     <a:lnL w="6350" cap="flat" cmpd="sng" algn="ctr">
                       <a:solidFill>
                         <a:srgbClr val="D1DCF0"/>
@@ -5279,11 +5191,11 @@
                     <a:bodyPr/>
                     <a:lstStyle/>
                     <a:p>
-                      <a:pPr algn="ctr" indent="0" marL="0">
+                      <a:pPr marL="0" indent="0" algn="ctr">
                         <a:buNone/>
                       </a:pPr>
                       <a:r>
-                        <a:rPr lang="en-US" sz="1100" b="1" dirty="0">
+                        <a:rPr lang="en-US" sz="1200" b="1" dirty="0">
                           <a:solidFill>
                             <a:srgbClr val="FF5000"/>
                           </a:solidFill>
@@ -5293,14 +5205,14 @@
                         </a:rPr>
                         <a:t>138</a:t>
                       </a:r>
-                      <a:endParaRPr lang="en-US" sz="1200" dirty="0">
+                      <a:endParaRPr lang="en-US" sz="1300" dirty="0">
                         <a:latin typeface="Noto Sans TC" charset="0"/>
                         <a:ea typeface="Noto Sans TC" charset="0"/>
                         <a:cs typeface="Noto Sans TC" charset="0"/>
                       </a:endParaRPr>
                     </a:p>
                   </a:txBody>
-                  <a:tcPr marL="91440" marR="91440" marT="45720" marB="45720" anchor="ctr">
+                  <a:tcPr marL="98568" marR="98568" marT="49284" marB="49284" anchor="ctr">
                     <a:lnL w="6350" cap="flat" cmpd="sng" algn="ctr">
                       <a:solidFill>
                         <a:srgbClr val="D1DCF0"/>
@@ -5342,6 +5254,11 @@
                     </a:solidFill>
                   </a:tcPr>
                 </a:tc>
+                <a:extLst>
+                  <a:ext uri="{0D108BD9-81ED-4DB2-BD59-A6C34878D82A}">
+                    <a16:rowId xmlns:a16="http://schemas.microsoft.com/office/drawing/2014/main" val="10004"/>
+                  </a:ext>
+                </a:extLst>
               </a:tr>
             </a:tbl>
           </a:graphicData>
@@ -5366,6 +5283,13 @@
           </a:solidFill>
           <a:ln/>
         </p:spPr>
+        <p:txBody>
+          <a:bodyPr/>
+          <a:lstStyle/>
+          <a:p>
+            <a:endParaRPr lang="zh-TW" altLang="en-US"/>
+          </a:p>
+        </p:txBody>
       </p:sp>
       <p:sp>
         <p:nvSpPr>
@@ -5388,7 +5312,7 @@
           <a:bodyPr wrap="square" rtlCol="0" anchor="ctr"/>
           <a:lstStyle/>
           <a:p>
-            <a:pPr indent="0" marL="0">
+            <a:pPr marL="0" indent="0">
               <a:buNone/>
             </a:pPr>
             <a:r>
@@ -5408,7 +5332,7 @@
       </p:sp>
       <p:graphicFrame>
         <p:nvGraphicFramePr>
-          <p:cNvPr id="8" name="Chart 0" descr=""/>
+          <p:cNvPr id="8" name="Chart 0"/>
           <p:cNvGraphicFramePr/>
           <p:nvPr/>
         </p:nvGraphicFramePr>
@@ -5416,9 +5340,9 @@
           <a:off x="64008" y="2642616"/>
           <a:ext cx="3529584" cy="2340864"/>
         </p:xfrm>
-        <a:graphic xmlns:a="http://schemas.openxmlformats.org/drawingml/2006/main">
+        <a:graphic>
           <a:graphicData uri="http://schemas.openxmlformats.org/drawingml/2006/chart">
-            <c:chart xmlns:c="http://schemas.openxmlformats.org/drawingml/2006/chart" r:id="rId1"/>
+            <c:chart xmlns:c="http://schemas.openxmlformats.org/drawingml/2006/chart" xmlns:r="http://schemas.openxmlformats.org/officeDocument/2006/relationships" r:id="rId3"/>
           </a:graphicData>
         </a:graphic>
       </p:graphicFrame>
@@ -5441,6 +5365,13 @@
           </a:solidFill>
           <a:ln/>
         </p:spPr>
+        <p:txBody>
+          <a:bodyPr/>
+          <a:lstStyle/>
+          <a:p>
+            <a:endParaRPr lang="zh-TW" altLang="en-US"/>
+          </a:p>
+        </p:txBody>
       </p:sp>
       <p:sp>
         <p:nvSpPr>
@@ -5463,7 +5394,7 @@
           <a:bodyPr wrap="square" rtlCol="0" anchor="ctr"/>
           <a:lstStyle/>
           <a:p>
-            <a:pPr indent="0" marL="0">
+            <a:pPr marL="0" indent="0">
               <a:buNone/>
             </a:pPr>
             <a:r>
@@ -5502,7 +5433,7 @@
           <a:bodyPr wrap="square" rtlCol="0" anchor="ctr"/>
           <a:lstStyle/>
           <a:p>
-            <a:pPr indent="0" marL="0">
+            <a:pPr marL="0" indent="0">
               <a:buNone/>
             </a:pPr>
             <a:r>
@@ -5539,6 +5470,13 @@
           </a:solidFill>
           <a:ln/>
         </p:spPr>
+        <p:txBody>
+          <a:bodyPr/>
+          <a:lstStyle/>
+          <a:p>
+            <a:endParaRPr lang="zh-TW" altLang="en-US"/>
+          </a:p>
+        </p:txBody>
       </p:sp>
       <p:sp>
         <p:nvSpPr>
@@ -5561,7 +5499,7 @@
           <a:bodyPr wrap="square" rtlCol="0" anchor="ctr"/>
           <a:lstStyle/>
           <a:p>
-            <a:pPr indent="0" marL="0">
+            <a:pPr marL="0" indent="0">
               <a:buNone/>
             </a:pPr>
             <a:r>
@@ -5600,7 +5538,7 @@
           <a:bodyPr wrap="square" rtlCol="0" anchor="ctr"/>
           <a:lstStyle/>
           <a:p>
-            <a:pPr indent="0" marL="0">
+            <a:pPr marL="0" indent="0">
               <a:buNone/>
             </a:pPr>
             <a:r>
@@ -5637,6 +5575,13 @@
           </a:solidFill>
           <a:ln/>
         </p:spPr>
+        <p:txBody>
+          <a:bodyPr/>
+          <a:lstStyle/>
+          <a:p>
+            <a:endParaRPr lang="zh-TW" altLang="en-US"/>
+          </a:p>
+        </p:txBody>
       </p:sp>
       <p:sp>
         <p:nvSpPr>
@@ -5659,7 +5604,7 @@
           <a:bodyPr wrap="square" rtlCol="0" anchor="ctr"/>
           <a:lstStyle/>
           <a:p>
-            <a:pPr indent="0" marL="0">
+            <a:pPr marL="0" indent="0">
               <a:buNone/>
             </a:pPr>
             <a:r>
@@ -5698,7 +5643,7 @@
           <a:bodyPr wrap="square" rtlCol="0" anchor="ctr"/>
           <a:lstStyle/>
           <a:p>
-            <a:pPr indent="0" marL="0">
+            <a:pPr marL="0" indent="0">
               <a:buNone/>
             </a:pPr>
             <a:r>
@@ -5735,6 +5680,13 @@
           </a:solidFill>
           <a:ln/>
         </p:spPr>
+        <p:txBody>
+          <a:bodyPr/>
+          <a:lstStyle/>
+          <a:p>
+            <a:endParaRPr lang="zh-TW" altLang="en-US"/>
+          </a:p>
+        </p:txBody>
       </p:sp>
       <p:sp>
         <p:nvSpPr>
@@ -5757,7 +5709,7 @@
           <a:bodyPr wrap="square" rtlCol="0" anchor="ctr"/>
           <a:lstStyle/>
           <a:p>
-            <a:pPr indent="0" marL="0">
+            <a:pPr marL="0" indent="0">
               <a:buNone/>
             </a:pPr>
             <a:r>
@@ -5796,7 +5748,7 @@
           <a:bodyPr wrap="square" rtlCol="0" anchor="ctr"/>
           <a:lstStyle/>
           <a:p>
-            <a:pPr indent="0" marL="0">
+            <a:pPr marL="0" indent="0">
               <a:buNone/>
             </a:pPr>
             <a:r>
@@ -5833,6 +5785,13 @@
           </a:solidFill>
           <a:ln/>
         </p:spPr>
+        <p:txBody>
+          <a:bodyPr/>
+          <a:lstStyle/>
+          <a:p>
+            <a:endParaRPr lang="zh-TW" altLang="en-US"/>
+          </a:p>
+        </p:txBody>
       </p:sp>
       <p:sp>
         <p:nvSpPr>
@@ -5855,7 +5814,7 @@
           <a:bodyPr wrap="square" rtlCol="0" anchor="ctr"/>
           <a:lstStyle/>
           <a:p>
-            <a:pPr indent="0" marL="0">
+            <a:pPr marL="0" indent="0">
               <a:buNone/>
             </a:pPr>
             <a:r>
@@ -5894,7 +5853,7 @@
           <a:bodyPr wrap="square" rtlCol="0" anchor="ctr"/>
           <a:lstStyle/>
           <a:p>
-            <a:pPr indent="0" marL="0">
+            <a:pPr marL="0" indent="0">
               <a:buNone/>
             </a:pPr>
             <a:r>
@@ -5931,6 +5890,13 @@
           </a:solidFill>
           <a:ln/>
         </p:spPr>
+        <p:txBody>
+          <a:bodyPr/>
+          <a:lstStyle/>
+          <a:p>
+            <a:endParaRPr lang="zh-TW" altLang="en-US"/>
+          </a:p>
+        </p:txBody>
       </p:sp>
       <p:sp>
         <p:nvSpPr>
@@ -5953,7 +5919,7 @@
           <a:bodyPr wrap="square" rtlCol="0" anchor="ctr"/>
           <a:lstStyle/>
           <a:p>
-            <a:pPr indent="0" marL="0">
+            <a:pPr marL="0" indent="0">
               <a:buNone/>
             </a:pPr>
             <a:r>
@@ -5992,7 +5958,7 @@
           <a:bodyPr wrap="square" rtlCol="0" anchor="ctr"/>
           <a:lstStyle/>
           <a:p>
-            <a:pPr indent="0" marL="0">
+            <a:pPr marL="0" indent="0">
               <a:buNone/>
             </a:pPr>
             <a:r>
@@ -6034,6 +6000,13 @@
             <a:prstDash val="solid"/>
           </a:ln>
         </p:spPr>
+        <p:txBody>
+          <a:bodyPr/>
+          <a:lstStyle/>
+          <a:p>
+            <a:endParaRPr lang="zh-TW" altLang="en-US"/>
+          </a:p>
+        </p:txBody>
       </p:sp>
       <p:sp>
         <p:nvSpPr>
@@ -6054,6 +6027,13 @@
           </a:solidFill>
           <a:ln/>
         </p:spPr>
+        <p:txBody>
+          <a:bodyPr/>
+          <a:lstStyle/>
+          <a:p>
+            <a:endParaRPr lang="zh-TW" altLang="en-US"/>
+          </a:p>
+        </p:txBody>
       </p:sp>
       <p:sp>
         <p:nvSpPr>
@@ -6076,7 +6056,7 @@
           <a:bodyPr wrap="square" rtlCol="0" anchor="ctr"/>
           <a:lstStyle/>
           <a:p>
-            <a:pPr indent="0" marL="0">
+            <a:pPr marL="0" indent="0">
               <a:buNone/>
             </a:pPr>
             <a:r>
@@ -6115,7 +6095,7 @@
           <a:bodyPr wrap="square" rtlCol="0" anchor="ctr"/>
           <a:lstStyle/>
           <a:p>
-            <a:pPr indent="0" marL="0">
+            <a:pPr marL="0" indent="0">
               <a:buNone/>
             </a:pPr>
             <a:r>
@@ -6154,7 +6134,7 @@
           <a:bodyPr wrap="square" rtlCol="0" anchor="ctr"/>
           <a:lstStyle/>
           <a:p>
-            <a:pPr indent="0" marL="0">
+            <a:pPr marL="0" indent="0">
               <a:buNone/>
             </a:pPr>
             <a:r>
@@ -6193,7 +6173,7 @@
           <a:bodyPr wrap="square" rtlCol="0" anchor="t"/>
           <a:lstStyle/>
           <a:p>
-            <a:pPr indent="0" marL="0">
+            <a:pPr marL="0" indent="0">
               <a:buNone/>
             </a:pPr>
             <a:endParaRPr lang="en-US" sz="600" dirty="0"/>
@@ -6219,6 +6199,13 @@
           </a:solidFill>
           <a:ln/>
         </p:spPr>
+        <p:txBody>
+          <a:bodyPr/>
+          <a:lstStyle/>
+          <a:p>
+            <a:endParaRPr lang="zh-TW" altLang="en-US"/>
+          </a:p>
+        </p:txBody>
       </p:sp>
       <p:sp>
         <p:nvSpPr>
@@ -6239,6 +6226,13 @@
           </a:solidFill>
           <a:ln/>
         </p:spPr>
+        <p:txBody>
+          <a:bodyPr/>
+          <a:lstStyle/>
+          <a:p>
+            <a:endParaRPr lang="zh-TW" altLang="en-US"/>
+          </a:p>
+        </p:txBody>
       </p:sp>
       <p:sp>
         <p:nvSpPr>
@@ -6264,6 +6258,13 @@
             <a:prstDash val="solid"/>
           </a:ln>
         </p:spPr>
+        <p:txBody>
+          <a:bodyPr/>
+          <a:lstStyle/>
+          <a:p>
+            <a:endParaRPr lang="zh-TW" altLang="en-US"/>
+          </a:p>
+        </p:txBody>
       </p:sp>
       <p:sp>
         <p:nvSpPr>
@@ -6284,6 +6285,13 @@
           </a:solidFill>
           <a:ln/>
         </p:spPr>
+        <p:txBody>
+          <a:bodyPr/>
+          <a:lstStyle/>
+          <a:p>
+            <a:endParaRPr lang="zh-TW" altLang="en-US"/>
+          </a:p>
+        </p:txBody>
       </p:sp>
       <p:sp>
         <p:nvSpPr>
@@ -6306,7 +6314,7 @@
           <a:bodyPr wrap="square" rtlCol="0" anchor="ctr"/>
           <a:lstStyle/>
           <a:p>
-            <a:pPr indent="0" marL="0">
+            <a:pPr marL="0" indent="0">
               <a:buNone/>
             </a:pPr>
             <a:r>
@@ -6345,7 +6353,7 @@
           <a:bodyPr wrap="square" rtlCol="0" anchor="ctr"/>
           <a:lstStyle/>
           <a:p>
-            <a:pPr indent="0" marL="0">
+            <a:pPr marL="0" indent="0">
               <a:buNone/>
             </a:pPr>
             <a:r>
@@ -6384,7 +6392,7 @@
           <a:bodyPr wrap="square" rtlCol="0" anchor="ctr"/>
           <a:lstStyle/>
           <a:p>
-            <a:pPr indent="0" marL="0">
+            <a:pPr marL="0" indent="0">
               <a:buNone/>
             </a:pPr>
             <a:r>
@@ -6423,7 +6431,7 @@
           <a:bodyPr wrap="square" rtlCol="0" anchor="t"/>
           <a:lstStyle/>
           <a:p>
-            <a:pPr indent="0" marL="0">
+            <a:pPr marL="0" indent="0">
               <a:buNone/>
             </a:pPr>
             <a:endParaRPr lang="en-US" sz="600" dirty="0"/>
@@ -6449,6 +6457,13 @@
           </a:solidFill>
           <a:ln/>
         </p:spPr>
+        <p:txBody>
+          <a:bodyPr/>
+          <a:lstStyle/>
+          <a:p>
+            <a:endParaRPr lang="zh-TW" altLang="en-US"/>
+          </a:p>
+        </p:txBody>
       </p:sp>
       <p:sp>
         <p:nvSpPr>
@@ -6469,6 +6484,13 @@
           </a:solidFill>
           <a:ln/>
         </p:spPr>
+        <p:txBody>
+          <a:bodyPr/>
+          <a:lstStyle/>
+          <a:p>
+            <a:endParaRPr lang="zh-TW" altLang="en-US"/>
+          </a:p>
+        </p:txBody>
       </p:sp>
       <p:sp>
         <p:nvSpPr>
@@ -6494,6 +6516,13 @@
             <a:prstDash val="solid"/>
           </a:ln>
         </p:spPr>
+        <p:txBody>
+          <a:bodyPr/>
+          <a:lstStyle/>
+          <a:p>
+            <a:endParaRPr lang="zh-TW" altLang="en-US"/>
+          </a:p>
+        </p:txBody>
       </p:sp>
       <p:sp>
         <p:nvSpPr>
@@ -6514,6 +6543,13 @@
           </a:solidFill>
           <a:ln/>
         </p:spPr>
+        <p:txBody>
+          <a:bodyPr/>
+          <a:lstStyle/>
+          <a:p>
+            <a:endParaRPr lang="zh-TW" altLang="en-US"/>
+          </a:p>
+        </p:txBody>
       </p:sp>
       <p:sp>
         <p:nvSpPr>
@@ -6536,7 +6572,7 @@
           <a:bodyPr wrap="square" rtlCol="0" anchor="ctr"/>
           <a:lstStyle/>
           <a:p>
-            <a:pPr indent="0" marL="0">
+            <a:pPr marL="0" indent="0">
               <a:buNone/>
             </a:pPr>
             <a:r>
@@ -6575,7 +6611,7 @@
           <a:bodyPr wrap="square" rtlCol="0" anchor="ctr"/>
           <a:lstStyle/>
           <a:p>
-            <a:pPr indent="0" marL="0">
+            <a:pPr marL="0" indent="0">
               <a:buNone/>
             </a:pPr>
             <a:r>
@@ -6614,7 +6650,7 @@
           <a:bodyPr wrap="square" rtlCol="0" anchor="ctr"/>
           <a:lstStyle/>
           <a:p>
-            <a:pPr indent="0" marL="0">
+            <a:pPr marL="0" indent="0">
               <a:buNone/>
             </a:pPr>
             <a:r>
@@ -6653,7 +6689,7 @@
           <a:bodyPr wrap="square" rtlCol="0" anchor="t"/>
           <a:lstStyle/>
           <a:p>
-            <a:pPr indent="0" marL="0">
+            <a:pPr marL="0" indent="0">
               <a:buNone/>
             </a:pPr>
             <a:endParaRPr lang="en-US" sz="600" dirty="0"/>
@@ -6679,6 +6715,13 @@
           </a:solidFill>
           <a:ln/>
         </p:spPr>
+        <p:txBody>
+          <a:bodyPr/>
+          <a:lstStyle/>
+          <a:p>
+            <a:endParaRPr lang="zh-TW" altLang="en-US"/>
+          </a:p>
+        </p:txBody>
       </p:sp>
       <p:sp>
         <p:nvSpPr>
@@ -6699,6 +6742,162 @@
           </a:solidFill>
           <a:ln/>
         </p:spPr>
+        <p:txBody>
+          <a:bodyPr/>
+          <a:lstStyle/>
+          <a:p>
+            <a:endParaRPr lang="zh-TW" altLang="en-US"/>
+          </a:p>
+        </p:txBody>
+      </p:sp>
+      <p:sp>
+        <p:nvSpPr>
+          <p:cNvPr id="52" name="文字方塊 51">
+            <a:extLst>
+              <a:ext uri="{FF2B5EF4-FFF2-40B4-BE49-F238E27FC236}">
+                <a16:creationId xmlns:a16="http://schemas.microsoft.com/office/drawing/2014/main" id="{83A42A95-CEDA-7FD6-6EE5-6C3D02495EF3}"/>
+              </a:ext>
+            </a:extLst>
+          </p:cNvPr>
+          <p:cNvSpPr txBox="1"/>
+          <p:nvPr/>
+        </p:nvSpPr>
+        <p:spPr>
+          <a:xfrm>
+            <a:off x="7452360" y="2950579"/>
+            <a:ext cx="1600200" cy="246221"/>
+          </a:xfrm>
+          <a:prstGeom prst="rect">
+            <a:avLst/>
+          </a:prstGeom>
+          <a:noFill/>
+        </p:spPr>
+        <p:txBody>
+          <a:bodyPr wrap="square">
+            <a:spAutoFit/>
+          </a:bodyPr>
+          <a:lstStyle/>
+          <a:p>
+            <a:pPr marL="0" indent="0">
+              <a:buNone/>
+            </a:pPr>
+            <a:r>
+              <a:rPr lang="zh-TW" altLang="en-US" sz="1000" b="1" dirty="0">
+                <a:solidFill>
+                  <a:schemeClr val="tx1">
+                    <a:lumMod val="50000"/>
+                    <a:lumOff val="50000"/>
+                  </a:schemeClr>
+                </a:solidFill>
+                <a:latin typeface="Noto Sans TC" pitchFamily="34" charset="0"/>
+                <a:ea typeface="Noto Sans TC" pitchFamily="34" charset="-122"/>
+              </a:rPr>
+              <a:t>收瓶機*</a:t>
+            </a:r>
+            <a:r>
+              <a:rPr lang="en-US" altLang="zh-TW" sz="1000" b="1" dirty="0">
+                <a:solidFill>
+                  <a:schemeClr val="tx1">
+                    <a:lumMod val="50000"/>
+                    <a:lumOff val="50000"/>
+                  </a:schemeClr>
+                </a:solidFill>
+                <a:latin typeface="Noto Sans TC" pitchFamily="34" charset="0"/>
+                <a:ea typeface="Noto Sans TC" pitchFamily="34" charset="-122"/>
+              </a:rPr>
+              <a:t>6 &amp; </a:t>
+            </a:r>
+            <a:r>
+              <a:rPr lang="zh-TW" altLang="en-US" sz="1000" b="1" dirty="0">
+                <a:solidFill>
+                  <a:schemeClr val="tx1">
+                    <a:lumMod val="50000"/>
+                    <a:lumOff val="50000"/>
+                  </a:schemeClr>
+                </a:solidFill>
+                <a:latin typeface="Noto Sans TC" pitchFamily="34" charset="0"/>
+                <a:ea typeface="Noto Sans TC" pitchFamily="34" charset="-122"/>
+              </a:rPr>
+              <a:t>電池機*</a:t>
+            </a:r>
+            <a:r>
+              <a:rPr lang="en-US" altLang="zh-TW" sz="1000" b="1" dirty="0">
+                <a:solidFill>
+                  <a:schemeClr val="tx1">
+                    <a:lumMod val="50000"/>
+                    <a:lumOff val="50000"/>
+                  </a:schemeClr>
+                </a:solidFill>
+                <a:latin typeface="Noto Sans TC" pitchFamily="34" charset="0"/>
+                <a:ea typeface="Noto Sans TC" pitchFamily="34" charset="-122"/>
+              </a:rPr>
+              <a:t>2</a:t>
+            </a:r>
+            <a:endParaRPr lang="en-US" altLang="zh-TW" sz="1000" dirty="0">
+              <a:solidFill>
+                <a:schemeClr val="tx1">
+                  <a:lumMod val="50000"/>
+                  <a:lumOff val="50000"/>
+                </a:schemeClr>
+              </a:solidFill>
+            </a:endParaRPr>
+          </a:p>
+        </p:txBody>
+      </p:sp>
+      <p:sp>
+        <p:nvSpPr>
+          <p:cNvPr id="54" name="文字方塊 53">
+            <a:extLst>
+              <a:ext uri="{FF2B5EF4-FFF2-40B4-BE49-F238E27FC236}">
+                <a16:creationId xmlns:a16="http://schemas.microsoft.com/office/drawing/2014/main" id="{868892F6-C3E9-2310-E977-7F8D756A8EC6}"/>
+              </a:ext>
+            </a:extLst>
+          </p:cNvPr>
+          <p:cNvSpPr txBox="1"/>
+          <p:nvPr/>
+        </p:nvSpPr>
+        <p:spPr>
+          <a:xfrm>
+            <a:off x="7488936" y="3797713"/>
+            <a:ext cx="1600200" cy="246221"/>
+          </a:xfrm>
+          <a:prstGeom prst="rect">
+            <a:avLst/>
+          </a:prstGeom>
+          <a:noFill/>
+        </p:spPr>
+        <p:txBody>
+          <a:bodyPr wrap="square">
+            <a:spAutoFit/>
+          </a:bodyPr>
+          <a:lstStyle/>
+          <a:p>
+            <a:pPr marL="0" indent="0">
+              <a:buNone/>
+            </a:pPr>
+            <a:r>
+              <a:rPr lang="zh-TW" altLang="en-US" sz="1000" b="1" dirty="0">
+                <a:solidFill>
+                  <a:schemeClr val="tx1">
+                    <a:lumMod val="50000"/>
+                    <a:lumOff val="50000"/>
+                  </a:schemeClr>
+                </a:solidFill>
+                <a:latin typeface="Noto Sans TC" pitchFamily="34" charset="0"/>
+                <a:ea typeface="Noto Sans TC" pitchFamily="34" charset="-122"/>
+              </a:rPr>
+              <a:t>數家優惠券</a:t>
+            </a:r>
+            <a:endParaRPr lang="en-US" altLang="zh-TW" sz="1000" dirty="0">
+              <a:solidFill>
+                <a:schemeClr val="tx1">
+                  <a:lumMod val="50000"/>
+                  <a:lumOff val="50000"/>
+                </a:schemeClr>
+              </a:solidFill>
+            </a:endParaRPr>
+          </a:p>
+        </p:txBody>
       </p:sp>
     </p:spTree>
   </p:cSld>
@@ -6716,6 +6915,7 @@
         <a:solidFill>
           <a:srgbClr val="FFFFFF"/>
         </a:solidFill>
+        <a:effectLst/>
       </p:bgPr>
     </p:bg>
     <p:spTree>
@@ -6753,7 +6953,7 @@
           <a:bodyPr wrap="square" rtlCol="0" anchor="ctr"/>
           <a:lstStyle/>
           <a:p>
-            <a:pPr indent="0" marL="0">
+            <a:pPr marL="0" indent="0">
               <a:buNone/>
             </a:pPr>
             <a:r>
@@ -6790,6 +6990,13 @@
           </a:solidFill>
           <a:ln/>
         </p:spPr>
+        <p:txBody>
+          <a:bodyPr/>
+          <a:lstStyle/>
+          <a:p>
+            <a:endParaRPr lang="zh-TW" altLang="en-US"/>
+          </a:p>
+        </p:txBody>
       </p:sp>
       <p:sp>
         <p:nvSpPr>
@@ -6812,7 +7019,7 @@
           <a:bodyPr wrap="square" rtlCol="0" anchor="ctr"/>
           <a:lstStyle/>
           <a:p>
-            <a:pPr indent="0" marL="0">
+            <a:pPr marL="0" indent="0">
               <a:buNone/>
             </a:pPr>
             <a:r>
@@ -6832,7 +7039,7 @@
       </p:sp>
       <p:graphicFrame>
         <p:nvGraphicFramePr>
-          <p:cNvPr id="5" name="Chart 0" descr=""/>
+          <p:cNvPr id="5" name="Chart 0"/>
           <p:cNvGraphicFramePr/>
           <p:nvPr/>
         </p:nvGraphicFramePr>
@@ -6840,9 +7047,9 @@
           <a:off x="64008" y="475488"/>
           <a:ext cx="2788920" cy="1554480"/>
         </p:xfrm>
-        <a:graphic xmlns:a="http://schemas.openxmlformats.org/drawingml/2006/main">
+        <a:graphic>
           <a:graphicData uri="http://schemas.openxmlformats.org/drawingml/2006/chart">
-            <c:chart xmlns:c="http://schemas.openxmlformats.org/drawingml/2006/chart" r:id="rId1"/>
+            <c:chart xmlns:c="http://schemas.openxmlformats.org/drawingml/2006/chart" xmlns:r="http://schemas.openxmlformats.org/officeDocument/2006/relationships" r:id="rId3"/>
           </a:graphicData>
         </a:graphic>
       </p:graphicFrame>
@@ -6865,6 +7072,13 @@
           </a:solidFill>
           <a:ln/>
         </p:spPr>
+        <p:txBody>
+          <a:bodyPr/>
+          <a:lstStyle/>
+          <a:p>
+            <a:endParaRPr lang="zh-TW" altLang="en-US"/>
+          </a:p>
+        </p:txBody>
       </p:sp>
       <p:sp>
         <p:nvSpPr>
@@ -6887,7 +7101,7 @@
           <a:bodyPr wrap="square" rtlCol="0" anchor="ctr"/>
           <a:lstStyle/>
           <a:p>
-            <a:pPr indent="0" marL="0">
+            <a:pPr marL="0" indent="0">
               <a:buNone/>
             </a:pPr>
             <a:r>
@@ -6924,6 +7138,13 @@
           </a:solidFill>
           <a:ln/>
         </p:spPr>
+        <p:txBody>
+          <a:bodyPr/>
+          <a:lstStyle/>
+          <a:p>
+            <a:endParaRPr lang="zh-TW" altLang="en-US"/>
+          </a:p>
+        </p:txBody>
       </p:sp>
       <p:sp>
         <p:nvSpPr>
@@ -6946,7 +7167,7 @@
           <a:bodyPr wrap="square" rtlCol="0" anchor="ctr"/>
           <a:lstStyle/>
           <a:p>
-            <a:pPr indent="0" marL="0">
+            <a:pPr marL="0" indent="0">
               <a:buNone/>
             </a:pPr>
             <a:r>
@@ -6983,6 +7204,13 @@
           </a:solidFill>
           <a:ln/>
         </p:spPr>
+        <p:txBody>
+          <a:bodyPr/>
+          <a:lstStyle/>
+          <a:p>
+            <a:endParaRPr lang="zh-TW" altLang="en-US"/>
+          </a:p>
+        </p:txBody>
       </p:sp>
       <p:sp>
         <p:nvSpPr>
@@ -7005,7 +7233,7 @@
           <a:bodyPr wrap="square" rtlCol="0" anchor="ctr"/>
           <a:lstStyle/>
           <a:p>
-            <a:pPr indent="0" marL="0">
+            <a:pPr marL="0" indent="0">
               <a:buNone/>
             </a:pPr>
             <a:r>
@@ -7042,6 +7270,13 @@
           </a:solidFill>
           <a:ln/>
         </p:spPr>
+        <p:txBody>
+          <a:bodyPr/>
+          <a:lstStyle/>
+          <a:p>
+            <a:endParaRPr lang="zh-TW" altLang="en-US"/>
+          </a:p>
+        </p:txBody>
       </p:sp>
       <p:sp>
         <p:nvSpPr>
@@ -7064,7 +7299,7 @@
           <a:bodyPr wrap="square" rtlCol="0" anchor="ctr"/>
           <a:lstStyle/>
           <a:p>
-            <a:pPr indent="0" marL="0">
+            <a:pPr marL="0" indent="0">
               <a:buNone/>
             </a:pPr>
             <a:r>
@@ -7101,6 +7336,13 @@
           </a:solidFill>
           <a:ln/>
         </p:spPr>
+        <p:txBody>
+          <a:bodyPr/>
+          <a:lstStyle/>
+          <a:p>
+            <a:endParaRPr lang="zh-TW" altLang="en-US"/>
+          </a:p>
+        </p:txBody>
       </p:sp>
       <p:sp>
         <p:nvSpPr>
@@ -7123,7 +7365,7 @@
           <a:bodyPr wrap="square" rtlCol="0" anchor="ctr"/>
           <a:lstStyle/>
           <a:p>
-            <a:pPr indent="0" marL="0">
+            <a:pPr marL="0" indent="0">
               <a:buNone/>
             </a:pPr>
             <a:r>
@@ -7160,6 +7402,13 @@
           </a:solidFill>
           <a:ln/>
         </p:spPr>
+        <p:txBody>
+          <a:bodyPr/>
+          <a:lstStyle/>
+          <a:p>
+            <a:endParaRPr lang="zh-TW" altLang="en-US"/>
+          </a:p>
+        </p:txBody>
       </p:sp>
       <p:sp>
         <p:nvSpPr>
@@ -7182,7 +7431,7 @@
           <a:bodyPr wrap="square" rtlCol="0" anchor="ctr"/>
           <a:lstStyle/>
           <a:p>
-            <a:pPr indent="0" marL="0">
+            <a:pPr marL="0" indent="0">
               <a:buNone/>
             </a:pPr>
             <a:r>
@@ -7224,6 +7473,13 @@
             <a:prstDash val="solid"/>
           </a:ln>
         </p:spPr>
+        <p:txBody>
+          <a:bodyPr/>
+          <a:lstStyle/>
+          <a:p>
+            <a:endParaRPr lang="zh-TW" altLang="en-US"/>
+          </a:p>
+        </p:txBody>
       </p:sp>
       <p:sp>
         <p:nvSpPr>
@@ -7246,7 +7502,7 @@
           <a:bodyPr wrap="square" rtlCol="0" anchor="ctr"/>
           <a:lstStyle/>
           <a:p>
-            <a:pPr algn="ctr" indent="0" marL="0">
+            <a:pPr marL="0" indent="0" algn="ctr">
               <a:buNone/>
             </a:pPr>
             <a:r>
@@ -7285,7 +7541,7 @@
           <a:bodyPr wrap="square" rtlCol="0" anchor="ctr"/>
           <a:lstStyle/>
           <a:p>
-            <a:pPr algn="ctr" indent="0" marL="0">
+            <a:pPr marL="0" indent="0" algn="ctr">
               <a:buNone/>
             </a:pPr>
             <a:r>
@@ -7324,7 +7580,7 @@
           <a:bodyPr wrap="square" rtlCol="0" anchor="ctr"/>
           <a:lstStyle/>
           <a:p>
-            <a:pPr algn="ctr" indent="0" marL="0">
+            <a:pPr marL="0" indent="0" algn="ctr">
               <a:buNone/>
             </a:pPr>
             <a:r>
@@ -7366,6 +7622,13 @@
             <a:prstDash val="solid"/>
           </a:ln>
         </p:spPr>
+        <p:txBody>
+          <a:bodyPr/>
+          <a:lstStyle/>
+          <a:p>
+            <a:endParaRPr lang="zh-TW" altLang="en-US"/>
+          </a:p>
+        </p:txBody>
       </p:sp>
       <p:sp>
         <p:nvSpPr>
@@ -7388,7 +7651,7 @@
           <a:bodyPr wrap="square" rtlCol="0" anchor="ctr"/>
           <a:lstStyle/>
           <a:p>
-            <a:pPr algn="ctr" indent="0" marL="0">
+            <a:pPr marL="0" indent="0" algn="ctr">
               <a:buNone/>
             </a:pPr>
             <a:r>
@@ -7427,7 +7690,7 @@
           <a:bodyPr wrap="square" rtlCol="0" anchor="ctr"/>
           <a:lstStyle/>
           <a:p>
-            <a:pPr algn="ctr" indent="0" marL="0">
+            <a:pPr marL="0" indent="0" algn="ctr">
               <a:buNone/>
             </a:pPr>
             <a:r>
@@ -7466,7 +7729,7 @@
           <a:bodyPr wrap="square" rtlCol="0" anchor="ctr"/>
           <a:lstStyle/>
           <a:p>
-            <a:pPr algn="ctr" indent="0" marL="0">
+            <a:pPr marL="0" indent="0" algn="ctr">
               <a:buNone/>
             </a:pPr>
             <a:r>
@@ -7503,6 +7766,13 @@
           </a:solidFill>
           <a:ln/>
         </p:spPr>
+        <p:txBody>
+          <a:bodyPr/>
+          <a:lstStyle/>
+          <a:p>
+            <a:endParaRPr lang="zh-TW" altLang="en-US"/>
+          </a:p>
+        </p:txBody>
       </p:sp>
       <p:sp>
         <p:nvSpPr>
@@ -7525,7 +7795,7 @@
           <a:bodyPr wrap="square" rtlCol="0" anchor="ctr"/>
           <a:lstStyle/>
           <a:p>
-            <a:pPr indent="0" marL="0">
+            <a:pPr marL="0" indent="0">
               <a:buNone/>
             </a:pPr>
             <a:r>
@@ -7562,6 +7832,13 @@
           </a:solidFill>
           <a:ln/>
         </p:spPr>
+        <p:txBody>
+          <a:bodyPr/>
+          <a:lstStyle/>
+          <a:p>
+            <a:endParaRPr lang="zh-TW" altLang="en-US"/>
+          </a:p>
+        </p:txBody>
       </p:sp>
       <p:sp>
         <p:nvSpPr>
@@ -7584,7 +7861,7 @@
           <a:bodyPr wrap="square" rtlCol="0" anchor="ctr"/>
           <a:lstStyle/>
           <a:p>
-            <a:pPr indent="0" marL="0">
+            <a:pPr marL="0" indent="0">
               <a:buNone/>
             </a:pPr>
             <a:r>
@@ -7621,6 +7898,13 @@
           </a:solidFill>
           <a:ln/>
         </p:spPr>
+        <p:txBody>
+          <a:bodyPr/>
+          <a:lstStyle/>
+          <a:p>
+            <a:endParaRPr lang="zh-TW" altLang="en-US"/>
+          </a:p>
+        </p:txBody>
       </p:sp>
       <p:sp>
         <p:nvSpPr>
@@ -7643,7 +7927,7 @@
           <a:bodyPr wrap="square" rtlCol="0" anchor="ctr"/>
           <a:lstStyle/>
           <a:p>
-            <a:pPr algn="ctr" indent="0" marL="0">
+            <a:pPr marL="0" indent="0" algn="ctr">
               <a:buNone/>
             </a:pPr>
             <a:r>
@@ -7660,7 +7944,7 @@
             <a:endParaRPr lang="en-US" sz="1050" dirty="0"/>
           </a:p>
           <a:p>
-            <a:pPr algn="ctr" indent="0" marL="0">
+            <a:pPr marL="0" indent="0" algn="ctr">
               <a:buNone/>
             </a:pPr>
             <a:r>
@@ -7677,7 +7961,7 @@
             <a:endParaRPr lang="en-US" sz="1050" dirty="0"/>
           </a:p>
           <a:p>
-            <a:pPr algn="ctr" indent="0" marL="0">
+            <a:pPr marL="0" indent="0" algn="ctr">
               <a:buNone/>
             </a:pPr>
             <a:r>
@@ -7719,6 +8003,13 @@
             <a:prstDash val="solid"/>
           </a:ln>
         </p:spPr>
+        <p:txBody>
+          <a:bodyPr/>
+          <a:lstStyle/>
+          <a:p>
+            <a:endParaRPr lang="zh-TW" altLang="en-US"/>
+          </a:p>
+        </p:txBody>
       </p:sp>
       <p:sp>
         <p:nvSpPr>
@@ -7741,7 +8032,7 @@
           <a:bodyPr wrap="square" rtlCol="0" anchor="ctr"/>
           <a:lstStyle/>
           <a:p>
-            <a:pPr indent="0" marL="0">
+            <a:pPr marL="0" indent="0">
               <a:buNone/>
             </a:pPr>
             <a:r>
@@ -7780,7 +8071,7 @@
           <a:bodyPr wrap="square" rtlCol="0" anchor="ctr"/>
           <a:lstStyle/>
           <a:p>
-            <a:pPr indent="0" marL="0">
+            <a:pPr marL="0" indent="0">
               <a:buNone/>
             </a:pPr>
             <a:r>
@@ -7819,7 +8110,7 @@
           <a:bodyPr wrap="square" rtlCol="0" anchor="ctr"/>
           <a:lstStyle/>
           <a:p>
-            <a:pPr algn="r" indent="0" marL="0">
+            <a:pPr marL="0" indent="0" algn="r">
               <a:buNone/>
             </a:pPr>
             <a:r>
@@ -7856,6 +8147,13 @@
           </a:solidFill>
           <a:ln/>
         </p:spPr>
+        <p:txBody>
+          <a:bodyPr/>
+          <a:lstStyle/>
+          <a:p>
+            <a:endParaRPr lang="zh-TW" altLang="en-US"/>
+          </a:p>
+        </p:txBody>
       </p:sp>
       <p:sp>
         <p:nvSpPr>
@@ -7876,6 +8174,13 @@
           </a:solidFill>
           <a:ln/>
         </p:spPr>
+        <p:txBody>
+          <a:bodyPr/>
+          <a:lstStyle/>
+          <a:p>
+            <a:endParaRPr lang="zh-TW" altLang="en-US"/>
+          </a:p>
+        </p:txBody>
       </p:sp>
       <p:sp>
         <p:nvSpPr>
@@ -7901,6 +8206,13 @@
             <a:prstDash val="solid"/>
           </a:ln>
         </p:spPr>
+        <p:txBody>
+          <a:bodyPr/>
+          <a:lstStyle/>
+          <a:p>
+            <a:endParaRPr lang="zh-TW" altLang="en-US"/>
+          </a:p>
+        </p:txBody>
       </p:sp>
       <p:sp>
         <p:nvSpPr>
@@ -7923,7 +8235,7 @@
           <a:bodyPr wrap="square" rtlCol="0" anchor="ctr"/>
           <a:lstStyle/>
           <a:p>
-            <a:pPr indent="0" marL="0">
+            <a:pPr marL="0" indent="0">
               <a:buNone/>
             </a:pPr>
             <a:r>
@@ -7962,7 +8274,7 @@
           <a:bodyPr wrap="square" rtlCol="0" anchor="ctr"/>
           <a:lstStyle/>
           <a:p>
-            <a:pPr indent="0" marL="0">
+            <a:pPr marL="0" indent="0">
               <a:buNone/>
             </a:pPr>
             <a:r>
@@ -8001,7 +8313,7 @@
           <a:bodyPr wrap="square" rtlCol="0" anchor="ctr"/>
           <a:lstStyle/>
           <a:p>
-            <a:pPr algn="r" indent="0" marL="0">
+            <a:pPr marL="0" indent="0" algn="r">
               <a:buNone/>
             </a:pPr>
             <a:r>
@@ -8038,6 +8350,13 @@
           </a:solidFill>
           <a:ln/>
         </p:spPr>
+        <p:txBody>
+          <a:bodyPr/>
+          <a:lstStyle/>
+          <a:p>
+            <a:endParaRPr lang="zh-TW" altLang="en-US"/>
+          </a:p>
+        </p:txBody>
       </p:sp>
       <p:sp>
         <p:nvSpPr>
@@ -8058,6 +8377,13 @@
           </a:solidFill>
           <a:ln/>
         </p:spPr>
+        <p:txBody>
+          <a:bodyPr/>
+          <a:lstStyle/>
+          <a:p>
+            <a:endParaRPr lang="zh-TW" altLang="en-US"/>
+          </a:p>
+        </p:txBody>
       </p:sp>
       <p:sp>
         <p:nvSpPr>
@@ -8083,6 +8409,13 @@
             <a:prstDash val="solid"/>
           </a:ln>
         </p:spPr>
+        <p:txBody>
+          <a:bodyPr/>
+          <a:lstStyle/>
+          <a:p>
+            <a:endParaRPr lang="zh-TW" altLang="en-US"/>
+          </a:p>
+        </p:txBody>
       </p:sp>
       <p:sp>
         <p:nvSpPr>
@@ -8105,7 +8438,7 @@
           <a:bodyPr wrap="square" rtlCol="0" anchor="ctr"/>
           <a:lstStyle/>
           <a:p>
-            <a:pPr indent="0" marL="0">
+            <a:pPr marL="0" indent="0">
               <a:buNone/>
             </a:pPr>
             <a:r>
@@ -8144,7 +8477,7 @@
           <a:bodyPr wrap="square" rtlCol="0" anchor="ctr"/>
           <a:lstStyle/>
           <a:p>
-            <a:pPr indent="0" marL="0">
+            <a:pPr marL="0" indent="0">
               <a:buNone/>
             </a:pPr>
             <a:r>
@@ -8183,7 +8516,7 @@
           <a:bodyPr wrap="square" rtlCol="0" anchor="ctr"/>
           <a:lstStyle/>
           <a:p>
-            <a:pPr algn="r" indent="0" marL="0">
+            <a:pPr marL="0" indent="0" algn="r">
               <a:buNone/>
             </a:pPr>
             <a:r>
@@ -8220,6 +8553,13 @@
           </a:solidFill>
           <a:ln/>
         </p:spPr>
+        <p:txBody>
+          <a:bodyPr/>
+          <a:lstStyle/>
+          <a:p>
+            <a:endParaRPr lang="zh-TW" altLang="en-US"/>
+          </a:p>
+        </p:txBody>
       </p:sp>
       <p:sp>
         <p:nvSpPr>
@@ -8240,6 +8580,13 @@
           </a:solidFill>
           <a:ln/>
         </p:spPr>
+        <p:txBody>
+          <a:bodyPr/>
+          <a:lstStyle/>
+          <a:p>
+            <a:endParaRPr lang="zh-TW" altLang="en-US"/>
+          </a:p>
+        </p:txBody>
       </p:sp>
       <p:sp>
         <p:nvSpPr>
@@ -8260,6 +8607,13 @@
           </a:solidFill>
           <a:ln/>
         </p:spPr>
+        <p:txBody>
+          <a:bodyPr/>
+          <a:lstStyle/>
+          <a:p>
+            <a:endParaRPr lang="zh-TW" altLang="en-US"/>
+          </a:p>
+        </p:txBody>
       </p:sp>
       <p:sp>
         <p:nvSpPr>
@@ -8282,7 +8636,7 @@
           <a:bodyPr wrap="square" rtlCol="0" anchor="ctr"/>
           <a:lstStyle/>
           <a:p>
-            <a:pPr algn="ctr" indent="0" marL="0">
+            <a:pPr marL="0" indent="0" algn="ctr">
               <a:buNone/>
             </a:pPr>
             <a:r>
@@ -8299,7 +8653,7 @@
             <a:endParaRPr lang="en-US" sz="1050" dirty="0"/>
           </a:p>
           <a:p>
-            <a:pPr algn="ctr" indent="0" marL="0">
+            <a:pPr marL="0" indent="0" algn="ctr">
               <a:buNone/>
             </a:pPr>
             <a:r>
@@ -8316,7 +8670,7 @@
             <a:endParaRPr lang="en-US" sz="1050" dirty="0"/>
           </a:p>
           <a:p>
-            <a:pPr algn="ctr" indent="0" marL="0">
+            <a:pPr marL="0" indent="0" algn="ctr">
               <a:buNone/>
             </a:pPr>
             <a:r>
@@ -8358,6 +8712,13 @@
             <a:prstDash val="solid"/>
           </a:ln>
         </p:spPr>
+        <p:txBody>
+          <a:bodyPr/>
+          <a:lstStyle/>
+          <a:p>
+            <a:endParaRPr lang="zh-TW" altLang="en-US"/>
+          </a:p>
+        </p:txBody>
       </p:sp>
       <p:sp>
         <p:nvSpPr>
@@ -8380,7 +8741,7 @@
           <a:bodyPr wrap="square" rtlCol="0" anchor="ctr"/>
           <a:lstStyle/>
           <a:p>
-            <a:pPr indent="0" marL="0">
+            <a:pPr marL="0" indent="0">
               <a:buNone/>
             </a:pPr>
             <a:r>
@@ -8419,7 +8780,7 @@
           <a:bodyPr wrap="square" rtlCol="0" anchor="ctr"/>
           <a:lstStyle/>
           <a:p>
-            <a:pPr indent="0" marL="0">
+            <a:pPr marL="0" indent="0">
               <a:buNone/>
             </a:pPr>
             <a:r>
@@ -8458,7 +8819,7 @@
           <a:bodyPr wrap="square" rtlCol="0" anchor="ctr"/>
           <a:lstStyle/>
           <a:p>
-            <a:pPr algn="r" indent="0" marL="0">
+            <a:pPr marL="0" indent="0" algn="r">
               <a:buNone/>
             </a:pPr>
             <a:r>
@@ -8495,6 +8856,13 @@
           </a:solidFill>
           <a:ln/>
         </p:spPr>
+        <p:txBody>
+          <a:bodyPr/>
+          <a:lstStyle/>
+          <a:p>
+            <a:endParaRPr lang="zh-TW" altLang="en-US"/>
+          </a:p>
+        </p:txBody>
       </p:sp>
       <p:sp>
         <p:nvSpPr>
@@ -8515,6 +8883,13 @@
           </a:solidFill>
           <a:ln/>
         </p:spPr>
+        <p:txBody>
+          <a:bodyPr/>
+          <a:lstStyle/>
+          <a:p>
+            <a:endParaRPr lang="zh-TW" altLang="en-US"/>
+          </a:p>
+        </p:txBody>
       </p:sp>
       <p:sp>
         <p:nvSpPr>
@@ -8540,6 +8915,13 @@
             <a:prstDash val="solid"/>
           </a:ln>
         </p:spPr>
+        <p:txBody>
+          <a:bodyPr/>
+          <a:lstStyle/>
+          <a:p>
+            <a:endParaRPr lang="zh-TW" altLang="en-US"/>
+          </a:p>
+        </p:txBody>
       </p:sp>
       <p:sp>
         <p:nvSpPr>
@@ -8562,7 +8944,7 @@
           <a:bodyPr wrap="square" rtlCol="0" anchor="ctr"/>
           <a:lstStyle/>
           <a:p>
-            <a:pPr indent="0" marL="0">
+            <a:pPr marL="0" indent="0">
               <a:buNone/>
             </a:pPr>
             <a:r>
@@ -8601,7 +8983,7 @@
           <a:bodyPr wrap="square" rtlCol="0" anchor="ctr"/>
           <a:lstStyle/>
           <a:p>
-            <a:pPr indent="0" marL="0">
+            <a:pPr marL="0" indent="0">
               <a:buNone/>
             </a:pPr>
             <a:r>
@@ -8640,7 +9022,7 @@
           <a:bodyPr wrap="square" rtlCol="0" anchor="ctr"/>
           <a:lstStyle/>
           <a:p>
-            <a:pPr algn="r" indent="0" marL="0">
+            <a:pPr marL="0" indent="0" algn="r">
               <a:buNone/>
             </a:pPr>
             <a:r>
@@ -8677,6 +9059,13 @@
           </a:solidFill>
           <a:ln/>
         </p:spPr>
+        <p:txBody>
+          <a:bodyPr/>
+          <a:lstStyle/>
+          <a:p>
+            <a:endParaRPr lang="zh-TW" altLang="en-US"/>
+          </a:p>
+        </p:txBody>
       </p:sp>
       <p:sp>
         <p:nvSpPr>
@@ -8697,6 +9086,13 @@
           </a:solidFill>
           <a:ln/>
         </p:spPr>
+        <p:txBody>
+          <a:bodyPr/>
+          <a:lstStyle/>
+          <a:p>
+            <a:endParaRPr lang="zh-TW" altLang="en-US"/>
+          </a:p>
+        </p:txBody>
       </p:sp>
       <p:sp>
         <p:nvSpPr>
@@ -8722,6 +9118,13 @@
             <a:prstDash val="solid"/>
           </a:ln>
         </p:spPr>
+        <p:txBody>
+          <a:bodyPr/>
+          <a:lstStyle/>
+          <a:p>
+            <a:endParaRPr lang="zh-TW" altLang="en-US"/>
+          </a:p>
+        </p:txBody>
       </p:sp>
       <p:sp>
         <p:nvSpPr>
@@ -8744,11 +9147,11 @@
           <a:bodyPr wrap="square" rtlCol="0" anchor="t"/>
           <a:lstStyle/>
           <a:p>
-            <a:pPr indent="0" marL="0">
+            <a:pPr marL="0" indent="0" algn="ctr">
               <a:buNone/>
             </a:pPr>
             <a:r>
-              <a:rPr lang="en-US" sz="750" dirty="0">
+              <a:rPr lang="en-US" sz="1300" dirty="0">
                 <a:solidFill>
                   <a:srgbClr val="6B4800"/>
                 </a:solidFill>
@@ -8758,7 +9161,7 @@
               </a:rPr>
               <a:t>收瓶機 瓶蓋桶已滿 43件（44.0%）居首，請確認清空頻率。</a:t>
             </a:r>
-            <a:endParaRPr lang="en-US" sz="750" dirty="0"/>
+            <a:endParaRPr lang="en-US" sz="1300" dirty="0"/>
           </a:p>
         </p:txBody>
       </p:sp>
@@ -8781,6 +9184,13 @@
           </a:solidFill>
           <a:ln/>
         </p:spPr>
+        <p:txBody>
+          <a:bodyPr/>
+          <a:lstStyle/>
+          <a:p>
+            <a:endParaRPr lang="zh-TW" altLang="en-US"/>
+          </a:p>
+        </p:txBody>
       </p:sp>
       <p:sp>
         <p:nvSpPr>
@@ -8803,7 +9213,7 @@
           <a:bodyPr wrap="square" rtlCol="0" anchor="ctr"/>
           <a:lstStyle/>
           <a:p>
-            <a:pPr indent="0" marL="0">
+            <a:pPr marL="0" indent="0">
               <a:buNone/>
             </a:pPr>
             <a:r>
@@ -8842,7 +9252,7 @@
           <a:bodyPr wrap="square" rtlCol="0" anchor="ctr"/>
           <a:lstStyle/>
           <a:p>
-            <a:pPr algn="r" indent="0" marL="0">
+            <a:pPr marL="0" indent="0" algn="r">
               <a:buNone/>
             </a:pPr>
             <a:r>
@@ -8881,7 +9291,7 @@
           <a:bodyPr wrap="square" rtlCol="0" anchor="ctr"/>
           <a:lstStyle/>
           <a:p>
-            <a:pPr indent="0" marL="0">
+            <a:pPr marL="0" indent="0">
               <a:buNone/>
             </a:pPr>
             <a:r>
@@ -8895,9 +9305,6 @@
               </a:rPr>
               <a:t>B  </a:t>
             </a:r>
-            <a:pPr indent="0" marL="0">
-              <a:buNone/>
-            </a:pPr>
             <a:r>
               <a:rPr lang="en-US" sz="850" dirty="0">
                 <a:solidFill>
@@ -8934,7 +9341,7 @@
           <a:bodyPr wrap="square" rtlCol="0" anchor="ctr"/>
           <a:lstStyle/>
           <a:p>
-            <a:pPr algn="r" indent="0" marL="0">
+            <a:pPr marL="0" indent="0" algn="r">
               <a:buNone/>
             </a:pPr>
             <a:r>
@@ -8973,7 +9380,7 @@
           <a:bodyPr wrap="square" rtlCol="0" anchor="ctr"/>
           <a:lstStyle/>
           <a:p>
-            <a:pPr indent="0" marL="0">
+            <a:pPr marL="0" indent="0">
               <a:buNone/>
             </a:pPr>
             <a:r>
@@ -8987,9 +9394,6 @@
               </a:rPr>
               <a:t>B  </a:t>
             </a:r>
-            <a:pPr indent="0" marL="0">
-              <a:buNone/>
-            </a:pPr>
             <a:r>
               <a:rPr lang="en-US" sz="850" dirty="0">
                 <a:solidFill>
@@ -9026,7 +9430,7 @@
           <a:bodyPr wrap="square" rtlCol="0" anchor="ctr"/>
           <a:lstStyle/>
           <a:p>
-            <a:pPr algn="r" indent="0" marL="0">
+            <a:pPr marL="0" indent="0" algn="r">
               <a:buNone/>
             </a:pPr>
             <a:r>
@@ -9065,7 +9469,7 @@
           <a:bodyPr wrap="square" rtlCol="0" anchor="ctr"/>
           <a:lstStyle/>
           <a:p>
-            <a:pPr indent="0" marL="0">
+            <a:pPr marL="0" indent="0">
               <a:buNone/>
             </a:pPr>
             <a:r>
@@ -9079,9 +9483,6 @@
               </a:rPr>
               <a:t>A  </a:t>
             </a:r>
-            <a:pPr indent="0" marL="0">
-              <a:buNone/>
-            </a:pPr>
             <a:r>
               <a:rPr lang="en-US" sz="850" dirty="0">
                 <a:solidFill>
@@ -9118,7 +9519,7 @@
           <a:bodyPr wrap="square" rtlCol="0" anchor="ctr"/>
           <a:lstStyle/>
           <a:p>
-            <a:pPr algn="r" indent="0" marL="0">
+            <a:pPr marL="0" indent="0" algn="r">
               <a:buNone/>
             </a:pPr>
             <a:r>
@@ -9155,6 +9556,13 @@
           </a:solidFill>
           <a:ln/>
         </p:spPr>
+        <p:txBody>
+          <a:bodyPr/>
+          <a:lstStyle/>
+          <a:p>
+            <a:endParaRPr lang="zh-TW" altLang="en-US"/>
+          </a:p>
+        </p:txBody>
       </p:sp>
       <p:sp>
         <p:nvSpPr>
@@ -9177,7 +9585,7 @@
           <a:bodyPr wrap="square" rtlCol="0" anchor="ctr"/>
           <a:lstStyle/>
           <a:p>
-            <a:pPr indent="0" marL="0">
+            <a:pPr marL="0" indent="0">
               <a:buNone/>
             </a:pPr>
             <a:r>
@@ -9216,7 +9624,7 @@
           <a:bodyPr wrap="square" rtlCol="0" anchor="ctr"/>
           <a:lstStyle/>
           <a:p>
-            <a:pPr algn="r" indent="0" marL="0">
+            <a:pPr marL="0" indent="0" algn="r">
               <a:buNone/>
             </a:pPr>
             <a:r>
@@ -9255,7 +9663,7 @@
           <a:bodyPr wrap="square" rtlCol="0" anchor="ctr"/>
           <a:lstStyle/>
           <a:p>
-            <a:pPr indent="0" marL="0">
+            <a:pPr marL="0" indent="0">
               <a:buNone/>
             </a:pPr>
             <a:r>
@@ -9269,9 +9677,6 @@
               </a:rPr>
               <a:t>C  </a:t>
             </a:r>
-            <a:pPr indent="0" marL="0">
-              <a:buNone/>
-            </a:pPr>
             <a:r>
               <a:rPr lang="en-US" sz="850" dirty="0">
                 <a:solidFill>
@@ -9308,7 +9713,7 @@
           <a:bodyPr wrap="square" rtlCol="0" anchor="ctr"/>
           <a:lstStyle/>
           <a:p>
-            <a:pPr algn="r" indent="0" marL="0">
+            <a:pPr marL="0" indent="0" algn="r">
               <a:buNone/>
             </a:pPr>
             <a:r>
@@ -9347,7 +9752,7 @@
           <a:bodyPr wrap="square" rtlCol="0" anchor="ctr"/>
           <a:lstStyle/>
           <a:p>
-            <a:pPr indent="0" marL="0">
+            <a:pPr marL="0" indent="0">
               <a:buNone/>
             </a:pPr>
             <a:r>
@@ -9361,11 +9766,8 @@
               </a:rPr>
               <a:t>C  </a:t>
             </a:r>
-            <a:pPr indent="0" marL="0">
-              <a:buNone/>
-            </a:pPr>
             <a:r>
-              <a:rPr lang="en-US" sz="850" dirty="0">
+              <a:rPr lang="en-US" sz="850" b="1" dirty="0">
                 <a:solidFill>
                   <a:srgbClr val="333333"/>
                 </a:solidFill>
@@ -9375,7 +9777,7 @@
               </a:rPr>
               <a:t>全聯福利中心苓雅三多店站</a:t>
             </a:r>
-            <a:endParaRPr lang="en-US" sz="900" dirty="0"/>
+            <a:endParaRPr lang="en-US" sz="900" b="1" dirty="0"/>
           </a:p>
         </p:txBody>
       </p:sp>
@@ -9400,7 +9802,7 @@
           <a:bodyPr wrap="square" rtlCol="0" anchor="ctr"/>
           <a:lstStyle/>
           <a:p>
-            <a:pPr algn="r" indent="0" marL="0">
+            <a:pPr marL="0" indent="0" algn="r">
               <a:buNone/>
             </a:pPr>
             <a:r>
@@ -9439,7 +9841,7 @@
           <a:bodyPr wrap="square" rtlCol="0" anchor="ctr"/>
           <a:lstStyle/>
           <a:p>
-            <a:pPr indent="0" marL="0">
+            <a:pPr marL="0" indent="0">
               <a:buNone/>
             </a:pPr>
             <a:r>
@@ -9453,9 +9855,6 @@
               </a:rPr>
               <a:t>A  </a:t>
             </a:r>
-            <a:pPr indent="0" marL="0">
-              <a:buNone/>
-            </a:pPr>
             <a:r>
               <a:rPr lang="en-US" sz="850" dirty="0">
                 <a:solidFill>
@@ -9492,7 +9891,7 @@
           <a:bodyPr wrap="square" rtlCol="0" anchor="ctr"/>
           <a:lstStyle/>
           <a:p>
-            <a:pPr algn="r" indent="0" marL="0">
+            <a:pPr marL="0" indent="0" algn="r">
               <a:buNone/>
             </a:pPr>
             <a:r>
@@ -9529,6 +9928,13 @@
           </a:solidFill>
           <a:ln/>
         </p:spPr>
+        <p:txBody>
+          <a:bodyPr/>
+          <a:lstStyle/>
+          <a:p>
+            <a:endParaRPr lang="zh-TW" altLang="en-US"/>
+          </a:p>
+        </p:txBody>
       </p:sp>
       <p:sp>
         <p:nvSpPr>
@@ -9551,7 +9957,7 @@
           <a:bodyPr wrap="square" rtlCol="0" anchor="ctr"/>
           <a:lstStyle/>
           <a:p>
-            <a:pPr indent="0" marL="0">
+            <a:pPr marL="0" indent="0">
               <a:buNone/>
             </a:pPr>
             <a:r>
@@ -9590,7 +9996,7 @@
           <a:bodyPr wrap="square" rtlCol="0" anchor="ctr"/>
           <a:lstStyle/>
           <a:p>
-            <a:pPr algn="r" indent="0" marL="0">
+            <a:pPr marL="0" indent="0" algn="r">
               <a:buNone/>
             </a:pPr>
             <a:r>
@@ -9629,7 +10035,7 @@
           <a:bodyPr wrap="square" rtlCol="0" anchor="ctr"/>
           <a:lstStyle/>
           <a:p>
-            <a:pPr indent="0" marL="0">
+            <a:pPr marL="0" indent="0">
               <a:buNone/>
             </a:pPr>
             <a:r>
@@ -9643,11 +10049,8 @@
               </a:rPr>
               <a:t>B  </a:t>
             </a:r>
-            <a:pPr indent="0" marL="0">
-              <a:buNone/>
-            </a:pPr>
             <a:r>
-              <a:rPr lang="en-US" sz="850" dirty="0">
+              <a:rPr lang="en-US" sz="850" b="1" dirty="0">
                 <a:solidFill>
                   <a:srgbClr val="333333"/>
                 </a:solidFill>
@@ -9657,7 +10060,7 @@
               </a:rPr>
               <a:t>全家佳里佳里興店站</a:t>
             </a:r>
-            <a:endParaRPr lang="en-US" sz="900" dirty="0"/>
+            <a:endParaRPr lang="en-US" sz="900" b="1" dirty="0"/>
           </a:p>
         </p:txBody>
       </p:sp>
@@ -9682,7 +10085,7 @@
           <a:bodyPr wrap="square" rtlCol="0" anchor="ctr"/>
           <a:lstStyle/>
           <a:p>
-            <a:pPr algn="r" indent="0" marL="0">
+            <a:pPr marL="0" indent="0" algn="r">
               <a:buNone/>
             </a:pPr>
             <a:r>
@@ -9721,7 +10124,7 @@
           <a:bodyPr wrap="square" rtlCol="0" anchor="ctr"/>
           <a:lstStyle/>
           <a:p>
-            <a:pPr indent="0" marL="0">
+            <a:pPr marL="0" indent="0">
               <a:buNone/>
             </a:pPr>
             <a:r>
@@ -9735,9 +10138,6 @@
               </a:rPr>
               <a:t>C  </a:t>
             </a:r>
-            <a:pPr indent="0" marL="0">
-              <a:buNone/>
-            </a:pPr>
             <a:r>
               <a:rPr lang="en-US" sz="850" dirty="0">
                 <a:solidFill>
@@ -9774,7 +10174,7 @@
           <a:bodyPr wrap="square" rtlCol="0" anchor="ctr"/>
           <a:lstStyle/>
           <a:p>
-            <a:pPr algn="r" indent="0" marL="0">
+            <a:pPr marL="0" indent="0" algn="r">
               <a:buNone/>
             </a:pPr>
             <a:r>
@@ -9813,7 +10213,7 @@
           <a:bodyPr wrap="square" rtlCol="0" anchor="ctr"/>
           <a:lstStyle/>
           <a:p>
-            <a:pPr indent="0" marL="0">
+            <a:pPr marL="0" indent="0">
               <a:buNone/>
             </a:pPr>
             <a:r>
@@ -9827,9 +10227,6 @@
               </a:rPr>
               <a:t>B  </a:t>
             </a:r>
-            <a:pPr indent="0" marL="0">
-              <a:buNone/>
-            </a:pPr>
             <a:r>
               <a:rPr lang="en-US" sz="850" dirty="0">
                 <a:solidFill>
@@ -9866,7 +10263,7 @@
           <a:bodyPr wrap="square" rtlCol="0" anchor="ctr"/>
           <a:lstStyle/>
           <a:p>
-            <a:pPr algn="r" indent="0" marL="0">
+            <a:pPr marL="0" indent="0" algn="r">
               <a:buNone/>
             </a:pPr>
             <a:r>
@@ -10185,4 +10582,319 @@
     </a:ext>
   </a:extLst>
 </a:theme>
+</file>
+
+<file path=ppt/theme/theme2.xml><?xml version="1.0" encoding="utf-8"?>
+<a:theme xmlns:a="http://schemas.openxmlformats.org/drawingml/2006/main" name="Office 佈景主題">
+  <a:themeElements>
+    <a:clrScheme name="Office">
+      <a:dk1>
+        <a:sysClr val="windowText" lastClr="000000"/>
+      </a:dk1>
+      <a:lt1>
+        <a:sysClr val="window" lastClr="FFFFFF"/>
+      </a:lt1>
+      <a:dk2>
+        <a:srgbClr val="0E2841"/>
+      </a:dk2>
+      <a:lt2>
+        <a:srgbClr val="E8E8E8"/>
+      </a:lt2>
+      <a:accent1>
+        <a:srgbClr val="156082"/>
+      </a:accent1>
+      <a:accent2>
+        <a:srgbClr val="E97132"/>
+      </a:accent2>
+      <a:accent3>
+        <a:srgbClr val="196B24"/>
+      </a:accent3>
+      <a:accent4>
+        <a:srgbClr val="0F9ED5"/>
+      </a:accent4>
+      <a:accent5>
+        <a:srgbClr val="A02B93"/>
+      </a:accent5>
+      <a:accent6>
+        <a:srgbClr val="4EA72E"/>
+      </a:accent6>
+      <a:hlink>
+        <a:srgbClr val="467886"/>
+      </a:hlink>
+      <a:folHlink>
+        <a:srgbClr val="96607D"/>
+      </a:folHlink>
+    </a:clrScheme>
+    <a:fontScheme name="Office">
+      <a:majorFont>
+        <a:latin typeface="Aptos Display" panose="02110004020202020204"/>
+        <a:ea typeface=""/>
+        <a:cs typeface=""/>
+        <a:font script="Jpan" typeface="游ゴシック Light"/>
+        <a:font script="Hang" typeface="맑은 고딕"/>
+        <a:font script="Hans" typeface="等线 Light"/>
+        <a:font script="Hant" typeface="新細明體"/>
+        <a:font script="Arab" typeface="Times New Roman"/>
+        <a:font script="Hebr" typeface="Times New Roman"/>
+        <a:font script="Thai" typeface="Angsana New"/>
+        <a:font script="Ethi" typeface="Nyala"/>
+        <a:font script="Beng" typeface="Vrinda"/>
+        <a:font script="Gujr" typeface="Shruti"/>
+        <a:font script="Khmr" typeface="MoolBoran"/>
+        <a:font script="Knda" typeface="Tunga"/>
+        <a:font script="Guru" typeface="Raavi"/>
+        <a:font script="Cans" typeface="Euphemia"/>
+        <a:font script="Cher" typeface="Plantagenet Cherokee"/>
+        <a:font script="Yiii" typeface="Microsoft Yi Baiti"/>
+        <a:font script="Tibt" typeface="Microsoft Himalaya"/>
+        <a:font script="Thaa" typeface="MV Boli"/>
+        <a:font script="Deva" typeface="Mangal"/>
+        <a:font script="Telu" typeface="Gautami"/>
+        <a:font script="Taml" typeface="Latha"/>
+        <a:font script="Syrc" typeface="Estrangelo Edessa"/>
+        <a:font script="Orya" typeface="Kalinga"/>
+        <a:font script="Mlym" typeface="Kartika"/>
+        <a:font script="Laoo" typeface="DokChampa"/>
+        <a:font script="Sinh" typeface="Iskoola Pota"/>
+        <a:font script="Mong" typeface="Mongolian Baiti"/>
+        <a:font script="Viet" typeface="Times New Roman"/>
+        <a:font script="Uigh" typeface="Microsoft Uighur"/>
+        <a:font script="Geor" typeface="Sylfaen"/>
+        <a:font script="Armn" typeface="Arial"/>
+        <a:font script="Bugi" typeface="Leelawadee UI"/>
+        <a:font script="Bopo" typeface="Microsoft JhengHei"/>
+        <a:font script="Java" typeface="Javanese Text"/>
+        <a:font script="Lisu" typeface="Segoe UI"/>
+        <a:font script="Mymr" typeface="Myanmar Text"/>
+        <a:font script="Nkoo" typeface="Ebrima"/>
+        <a:font script="Olck" typeface="Nirmala UI"/>
+        <a:font script="Osma" typeface="Ebrima"/>
+        <a:font script="Phag" typeface="Phagspa"/>
+        <a:font script="Syrn" typeface="Estrangelo Edessa"/>
+        <a:font script="Syrj" typeface="Estrangelo Edessa"/>
+        <a:font script="Syre" typeface="Estrangelo Edessa"/>
+        <a:font script="Sora" typeface="Nirmala UI"/>
+        <a:font script="Tale" typeface="Microsoft Tai Le"/>
+        <a:font script="Talu" typeface="Microsoft New Tai Lue"/>
+        <a:font script="Tfng" typeface="Ebrima"/>
+      </a:majorFont>
+      <a:minorFont>
+        <a:latin typeface="Aptos" panose="02110004020202020204"/>
+        <a:ea typeface=""/>
+        <a:cs typeface=""/>
+        <a:font script="Jpan" typeface="游ゴシック"/>
+        <a:font script="Hang" typeface="맑은 고딕"/>
+        <a:font script="Hans" typeface="等线"/>
+        <a:font script="Hant" typeface="新細明體"/>
+        <a:font script="Arab" typeface="Arial"/>
+        <a:font script="Hebr" typeface="Arial"/>
+        <a:font script="Thai" typeface="Cordia New"/>
+        <a:font script="Ethi" typeface="Nyala"/>
+        <a:font script="Beng" typeface="Vrinda"/>
+        <a:font script="Gujr" typeface="Shruti"/>
+        <a:font script="Khmr" typeface="DaunPenh"/>
+        <a:font script="Knda" typeface="Tunga"/>
+        <a:font script="Guru" typeface="Raavi"/>
+        <a:font script="Cans" typeface="Euphemia"/>
+        <a:font script="Cher" typeface="Plantagenet Cherokee"/>
+        <a:font script="Yiii" typeface="Microsoft Yi Baiti"/>
+        <a:font script="Tibt" typeface="Microsoft Himalaya"/>
+        <a:font script="Thaa" typeface="MV Boli"/>
+        <a:font script="Deva" typeface="Mangal"/>
+        <a:font script="Telu" typeface="Gautami"/>
+        <a:font script="Taml" typeface="Latha"/>
+        <a:font script="Syrc" typeface="Estrangelo Edessa"/>
+        <a:font script="Orya" typeface="Kalinga"/>
+        <a:font script="Mlym" typeface="Kartika"/>
+        <a:font script="Laoo" typeface="DokChampa"/>
+        <a:font script="Sinh" typeface="Iskoola Pota"/>
+        <a:font script="Mong" typeface="Mongolian Baiti"/>
+        <a:font script="Viet" typeface="Arial"/>
+        <a:font script="Uigh" typeface="Microsoft Uighur"/>
+        <a:font script="Geor" typeface="Sylfaen"/>
+        <a:font script="Armn" typeface="Arial"/>
+        <a:font script="Bugi" typeface="Leelawadee UI"/>
+        <a:font script="Bopo" typeface="Microsoft JhengHei"/>
+        <a:font script="Java" typeface="Javanese Text"/>
+        <a:font script="Lisu" typeface="Segoe UI"/>
+        <a:font script="Mymr" typeface="Myanmar Text"/>
+        <a:font script="Nkoo" typeface="Ebrima"/>
+        <a:font script="Olck" typeface="Nirmala UI"/>
+        <a:font script="Osma" typeface="Ebrima"/>
+        <a:font script="Phag" typeface="Phagspa"/>
+        <a:font script="Syrn" typeface="Estrangelo Edessa"/>
+        <a:font script="Syrj" typeface="Estrangelo Edessa"/>
+        <a:font script="Syre" typeface="Estrangelo Edessa"/>
+        <a:font script="Sora" typeface="Nirmala UI"/>
+        <a:font script="Tale" typeface="Microsoft Tai Le"/>
+        <a:font script="Talu" typeface="Microsoft New Tai Lue"/>
+        <a:font script="Tfng" typeface="Ebrima"/>
+      </a:minorFont>
+    </a:fontScheme>
+    <a:fmtScheme name="Office">
+      <a:fillStyleLst>
+        <a:solidFill>
+          <a:schemeClr val="phClr"/>
+        </a:solidFill>
+        <a:gradFill rotWithShape="1">
+          <a:gsLst>
+            <a:gs pos="0">
+              <a:schemeClr val="phClr">
+                <a:lumMod val="110000"/>
+                <a:satMod val="105000"/>
+                <a:tint val="67000"/>
+              </a:schemeClr>
+            </a:gs>
+            <a:gs pos="50000">
+              <a:schemeClr val="phClr">
+                <a:lumMod val="105000"/>
+                <a:satMod val="103000"/>
+                <a:tint val="73000"/>
+              </a:schemeClr>
+            </a:gs>
+            <a:gs pos="100000">
+              <a:schemeClr val="phClr">
+                <a:lumMod val="105000"/>
+                <a:satMod val="109000"/>
+                <a:tint val="81000"/>
+              </a:schemeClr>
+            </a:gs>
+          </a:gsLst>
+          <a:lin ang="5400000" scaled="0"/>
+        </a:gradFill>
+        <a:gradFill rotWithShape="1">
+          <a:gsLst>
+            <a:gs pos="0">
+              <a:schemeClr val="phClr">
+                <a:satMod val="103000"/>
+                <a:lumMod val="102000"/>
+                <a:tint val="94000"/>
+              </a:schemeClr>
+            </a:gs>
+            <a:gs pos="50000">
+              <a:schemeClr val="phClr">
+                <a:satMod val="110000"/>
+                <a:lumMod val="100000"/>
+                <a:shade val="100000"/>
+              </a:schemeClr>
+            </a:gs>
+            <a:gs pos="100000">
+              <a:schemeClr val="phClr">
+                <a:lumMod val="99000"/>
+                <a:satMod val="120000"/>
+                <a:shade val="78000"/>
+              </a:schemeClr>
+            </a:gs>
+          </a:gsLst>
+          <a:lin ang="5400000" scaled="0"/>
+        </a:gradFill>
+      </a:fillStyleLst>
+      <a:lnStyleLst>
+        <a:ln w="12700" cap="flat" cmpd="sng" algn="ctr">
+          <a:solidFill>
+            <a:schemeClr val="phClr"/>
+          </a:solidFill>
+          <a:prstDash val="solid"/>
+          <a:miter lim="800000"/>
+        </a:ln>
+        <a:ln w="19050" cap="flat" cmpd="sng" algn="ctr">
+          <a:solidFill>
+            <a:schemeClr val="phClr"/>
+          </a:solidFill>
+          <a:prstDash val="solid"/>
+          <a:miter lim="800000"/>
+        </a:ln>
+        <a:ln w="25400" cap="flat" cmpd="sng" algn="ctr">
+          <a:solidFill>
+            <a:schemeClr val="phClr"/>
+          </a:solidFill>
+          <a:prstDash val="solid"/>
+          <a:miter lim="800000"/>
+        </a:ln>
+      </a:lnStyleLst>
+      <a:effectStyleLst>
+        <a:effectStyle>
+          <a:effectLst/>
+        </a:effectStyle>
+        <a:effectStyle>
+          <a:effectLst/>
+        </a:effectStyle>
+        <a:effectStyle>
+          <a:effectLst>
+            <a:outerShdw blurRad="57150" dist="19050" dir="5400000" algn="ctr" rotWithShape="0">
+              <a:srgbClr val="000000">
+                <a:alpha val="63000"/>
+              </a:srgbClr>
+            </a:outerShdw>
+          </a:effectLst>
+        </a:effectStyle>
+      </a:effectStyleLst>
+      <a:bgFillStyleLst>
+        <a:solidFill>
+          <a:schemeClr val="phClr"/>
+        </a:solidFill>
+        <a:solidFill>
+          <a:schemeClr val="phClr">
+            <a:tint val="95000"/>
+            <a:satMod val="170000"/>
+          </a:schemeClr>
+        </a:solidFill>
+        <a:gradFill rotWithShape="1">
+          <a:gsLst>
+            <a:gs pos="0">
+              <a:schemeClr val="phClr">
+                <a:tint val="93000"/>
+                <a:satMod val="150000"/>
+                <a:shade val="98000"/>
+                <a:lumMod val="102000"/>
+              </a:schemeClr>
+            </a:gs>
+            <a:gs pos="50000">
+              <a:schemeClr val="phClr">
+                <a:tint val="98000"/>
+                <a:satMod val="130000"/>
+                <a:shade val="90000"/>
+                <a:lumMod val="103000"/>
+              </a:schemeClr>
+            </a:gs>
+            <a:gs pos="100000">
+              <a:schemeClr val="phClr">
+                <a:shade val="63000"/>
+                <a:satMod val="120000"/>
+              </a:schemeClr>
+            </a:gs>
+          </a:gsLst>
+          <a:lin ang="5400000" scaled="0"/>
+        </a:gradFill>
+      </a:bgFillStyleLst>
+    </a:fmtScheme>
+  </a:themeElements>
+  <a:objectDefaults>
+    <a:lnDef>
+      <a:spPr/>
+      <a:bodyPr/>
+      <a:lstStyle/>
+      <a:style>
+        <a:lnRef idx="2">
+          <a:schemeClr val="accent1"/>
+        </a:lnRef>
+        <a:fillRef idx="0">
+          <a:schemeClr val="accent1"/>
+        </a:fillRef>
+        <a:effectRef idx="1">
+          <a:schemeClr val="accent1"/>
+        </a:effectRef>
+        <a:fontRef idx="minor">
+          <a:schemeClr val="tx1"/>
+        </a:fontRef>
+      </a:style>
+    </a:lnDef>
+  </a:objectDefaults>
+  <a:extraClrSchemeLst/>
+  <a:extLst>
+    <a:ext uri="{05A4C25C-085E-4340-85A3-A5531E510DB2}">
+      <thm15:themeFamily xmlns:thm15="http://schemas.microsoft.com/office/thememl/2012/main" name="Office Theme" id="{2E142A2C-CD16-42D6-873A-C26D2A0506FA}" vid="{1BDDFF52-6CD6-40A5-AB3C-68EB2F1E4D0A}"/>
+    </a:ext>
+  </a:extLst>
+</a:theme>
 </file>